--- a/report/Kinetica_Project_Review_Presentation.pptx
+++ b/report/Kinetica_Project_Review_Presentation.pptx
@@ -4602,7 +4602,10 @@
               </a:defRPr>
             </a:pPr>
             <a:r>
-              <a:t>BCSE497J — PROJECT I | PRE-FINAL GUIDE REVIEW (25 MARKS)</a:t>
+              <a:rPr>
+                <a:latin typeface="Calibri"/>
+              </a:rPr>
+              <a:t>BCSE497J  -  PROJECT I | PRE-FINAL GUIDE REVIEW (25 MARKS)</a:t>
             </a:r>
           </a:p>
         </p:txBody>
@@ -4638,6 +4641,9 @@
               </a:defRPr>
             </a:pPr>
             <a:r>
+              <a:rPr>
+                <a:latin typeface="Calibri"/>
+              </a:rPr>
               <a:t>PROJECT KINETICA</a:t>
             </a:r>
           </a:p>
@@ -4654,6 +4660,9 @@
               </a:defRPr>
             </a:pPr>
             <a:r>
+              <a:rPr>
+                <a:latin typeface="Calibri"/>
+              </a:rPr>
               <a:t>A Closed-Loop Cyber-Physical System for Perception-Driven Traffic Signal Control, Stochastic Queue Actuation, and Priority-Aware Green Wave Preemption</a:t>
             </a:r>
           </a:p>
@@ -4712,6 +4721,9 @@
               </a:defRPr>
             </a:pPr>
             <a:r>
+              <a:rPr>
+                <a:latin typeface="Calibri"/>
+              </a:rPr>
               <a:t>Candidate &amp; Team Details</a:t>
             </a:r>
           </a:p>
@@ -4728,55 +4740,67 @@
               </a:defRPr>
             </a:pPr>
             <a:r>
-              <a:t>• Vaibhav P.K (Register No: 23BDS1148) — Lead Candidate</a:t>
-            </a:r>
-          </a:p>
-          <a:p>
-            <a:pPr>
-              <a:spcAft>
-                <a:spcPts val="600"/>
-              </a:spcAft>
-              <a:defRPr sz="1200">
-                <a:solidFill>
-                  <a:srgbClr val="F8FAFC"/>
-                </a:solidFill>
-                <a:latin typeface="Calibri"/>
-              </a:defRPr>
-            </a:pPr>
-            <a:r>
-              <a:t>• Mithil Girish (Register No: 23BDS1168) — Team Member</a:t>
-            </a:r>
-          </a:p>
-          <a:p>
-            <a:pPr>
-              <a:spcAft>
-                <a:spcPts val="600"/>
-              </a:spcAft>
-              <a:defRPr sz="1200">
-                <a:solidFill>
-                  <a:srgbClr val="F8FAFC"/>
-                </a:solidFill>
-                <a:latin typeface="Calibri"/>
-              </a:defRPr>
-            </a:pPr>
-            <a:r>
-              <a:t>• B.Tech. Computer Science &amp; Engineering (Spl. in Data Science)</a:t>
-            </a:r>
-          </a:p>
-          <a:p>
-            <a:pPr>
-              <a:spcAft>
-                <a:spcPts val="600"/>
-              </a:spcAft>
-              <a:defRPr sz="1200">
-                <a:solidFill>
-                  <a:srgbClr val="F8FAFC"/>
-                </a:solidFill>
-                <a:latin typeface="Calibri"/>
-              </a:defRPr>
-            </a:pPr>
-            <a:r>
-              <a:t>• School of Computer Science &amp; Engineering (SCOPE), VIT Chennai</a:t>
+              <a:rPr>
+                <a:latin typeface="Calibri"/>
+              </a:rPr>
+              <a:t>- Vaibhav P.K (Register No: 23BDS1148)  -  Lead Candidate</a:t>
+            </a:r>
+          </a:p>
+          <a:p>
+            <a:pPr>
+              <a:spcAft>
+                <a:spcPts val="600"/>
+              </a:spcAft>
+              <a:defRPr sz="1200">
+                <a:solidFill>
+                  <a:srgbClr val="F8FAFC"/>
+                </a:solidFill>
+                <a:latin typeface="Calibri"/>
+              </a:defRPr>
+            </a:pPr>
+            <a:r>
+              <a:rPr>
+                <a:latin typeface="Calibri"/>
+              </a:rPr>
+              <a:t>- Mithil Girish (Register No: 23BDS1168)  -  Team Member</a:t>
+            </a:r>
+          </a:p>
+          <a:p>
+            <a:pPr>
+              <a:spcAft>
+                <a:spcPts val="600"/>
+              </a:spcAft>
+              <a:defRPr sz="1200">
+                <a:solidFill>
+                  <a:srgbClr val="F8FAFC"/>
+                </a:solidFill>
+                <a:latin typeface="Calibri"/>
+              </a:defRPr>
+            </a:pPr>
+            <a:r>
+              <a:rPr>
+                <a:latin typeface="Calibri"/>
+              </a:rPr>
+              <a:t>- B.Tech. Computer Science &amp; Engineering (Spl. in Data Science)</a:t>
+            </a:r>
+          </a:p>
+          <a:p>
+            <a:pPr>
+              <a:spcAft>
+                <a:spcPts val="600"/>
+              </a:spcAft>
+              <a:defRPr sz="1200">
+                <a:solidFill>
+                  <a:srgbClr val="F8FAFC"/>
+                </a:solidFill>
+                <a:latin typeface="Calibri"/>
+              </a:defRPr>
+            </a:pPr>
+            <a:r>
+              <a:rPr>
+                <a:latin typeface="Calibri"/>
+              </a:rPr>
+              <a:t>- School of Computer Science &amp; Engineering (SCOPE), VIT Chennai</a:t>
             </a:r>
           </a:p>
         </p:txBody>
@@ -4834,6 +4858,9 @@
               </a:defRPr>
             </a:pPr>
             <a:r>
+              <a:rPr>
+                <a:latin typeface="Calibri"/>
+              </a:rPr>
               <a:t>Mentorship &amp; Academic Credentials</a:t>
             </a:r>
           </a:p>
@@ -4850,55 +4877,67 @@
               </a:defRPr>
             </a:pPr>
             <a:r>
-              <a:t>• Faculty Project Guide: Dr. R. KRITHIGA (krithiga.r@vit.ac.in)</a:t>
-            </a:r>
-          </a:p>
-          <a:p>
-            <a:pPr>
-              <a:spcAft>
-                <a:spcPts val="600"/>
-              </a:spcAft>
-              <a:defRPr sz="1200">
-                <a:solidFill>
-                  <a:srgbClr val="F8FAFC"/>
-                </a:solidFill>
-                <a:latin typeface="Calibri"/>
-              </a:defRPr>
-            </a:pPr>
-            <a:r>
-              <a:t>• Head of Department: Dr. Vergin Raja Sarobin M, SCOPE</a:t>
-            </a:r>
-          </a:p>
-          <a:p>
-            <a:pPr>
-              <a:spcAft>
-                <a:spcPts val="600"/>
-              </a:spcAft>
-              <a:defRPr sz="1200">
-                <a:solidFill>
-                  <a:srgbClr val="F8FAFC"/>
-                </a:solidFill>
-                <a:latin typeface="Calibri"/>
-              </a:defRPr>
-            </a:pPr>
-            <a:r>
-              <a:t>• Course Coordinator: Dr. M. Suguna, SCOPE</a:t>
-            </a:r>
-          </a:p>
-          <a:p>
-            <a:pPr>
-              <a:spcAft>
-                <a:spcPts val="600"/>
-              </a:spcAft>
-              <a:defRPr sz="1200">
-                <a:solidFill>
-                  <a:srgbClr val="F8FAFC"/>
-                </a:solidFill>
-                <a:latin typeface="Calibri"/>
-              </a:defRPr>
-            </a:pPr>
-            <a:r>
-              <a:t>• Review Period: October 12–16, 2026 | VTOP Deadline: Oct 21, 2026</a:t>
+              <a:rPr>
+                <a:latin typeface="Calibri"/>
+              </a:rPr>
+              <a:t>- Faculty Project Guide: Dr. R. KRITHIGA (krithiga.r@vit.ac.in)</a:t>
+            </a:r>
+          </a:p>
+          <a:p>
+            <a:pPr>
+              <a:spcAft>
+                <a:spcPts val="600"/>
+              </a:spcAft>
+              <a:defRPr sz="1200">
+                <a:solidFill>
+                  <a:srgbClr val="F8FAFC"/>
+                </a:solidFill>
+                <a:latin typeface="Calibri"/>
+              </a:defRPr>
+            </a:pPr>
+            <a:r>
+              <a:rPr>
+                <a:latin typeface="Calibri"/>
+              </a:rPr>
+              <a:t>- Head of Department: Dr. Vergin Raja Sarobin M, SCOPE</a:t>
+            </a:r>
+          </a:p>
+          <a:p>
+            <a:pPr>
+              <a:spcAft>
+                <a:spcPts val="600"/>
+              </a:spcAft>
+              <a:defRPr sz="1200">
+                <a:solidFill>
+                  <a:srgbClr val="F8FAFC"/>
+                </a:solidFill>
+                <a:latin typeface="Calibri"/>
+              </a:defRPr>
+            </a:pPr>
+            <a:r>
+              <a:rPr>
+                <a:latin typeface="Calibri"/>
+              </a:rPr>
+              <a:t>- Course Coordinator: Dr. M. Suguna, SCOPE</a:t>
+            </a:r>
+          </a:p>
+          <a:p>
+            <a:pPr>
+              <a:spcAft>
+                <a:spcPts val="600"/>
+              </a:spcAft>
+              <a:defRPr sz="1200">
+                <a:solidFill>
+                  <a:srgbClr val="F8FAFC"/>
+                </a:solidFill>
+                <a:latin typeface="Calibri"/>
+              </a:defRPr>
+            </a:pPr>
+            <a:r>
+              <a:rPr>
+                <a:latin typeface="Calibri"/>
+              </a:rPr>
+              <a:t>- Review Period: October 12-16, 2026 | VTOP Deadline: Oct 21, 2026</a:t>
             </a:r>
           </a:p>
         </p:txBody>
@@ -4997,6 +5036,9 @@
               </a:defRPr>
             </a:pPr>
             <a:r>
+              <a:rPr>
+                <a:latin typeface="Calibri"/>
+              </a:rPr>
               <a:t>100% IMPLEMENTATION DEMONSTRATION (10 MARKS)</a:t>
             </a:r>
           </a:p>
@@ -5033,6 +5075,9 @@
               </a:defRPr>
             </a:pPr>
             <a:r>
+              <a:rPr>
+                <a:latin typeface="Calibri"/>
+              </a:rPr>
               <a:t>Live Demonstration Checklist &amp; Execution Runbook</a:t>
             </a:r>
           </a:p>
@@ -5069,6 +5114,9 @@
               </a:defRPr>
             </a:pPr>
             <a:r>
+              <a:rPr>
+                <a:latin typeface="Calibri"/>
+              </a:rPr>
               <a:t>End-to-end verification across edge gateway, frontend dashboard, and automated test suite</a:t>
             </a:r>
           </a:p>
@@ -5127,6 +5175,9 @@
               </a:defRPr>
             </a:pPr>
             <a:r>
+              <a:rPr>
+                <a:latin typeface="Calibri"/>
+              </a:rPr>
               <a:t>Live System Verification Checklist</a:t>
             </a:r>
           </a:p>
@@ -5143,6 +5194,9 @@
               </a:defRPr>
             </a:pPr>
             <a:r>
+              <a:rPr>
+                <a:latin typeface="Calibri"/>
+              </a:rPr>
               <a:t>[x] FastAPI Edge Gateway Backend:</a:t>
             </a:r>
           </a:p>
@@ -5159,6 +5213,9 @@
               </a:defRPr>
             </a:pPr>
             <a:r>
+              <a:rPr>
+                <a:latin typeface="Calibri"/>
+              </a:rPr>
               <a:t>    Running on http://localhost:8000 (YOLOv8n ONNX loaded, nominal).</a:t>
             </a:r>
           </a:p>
@@ -5188,6 +5245,9 @@
               </a:defRPr>
             </a:pPr>
             <a:r>
+              <a:rPr>
+                <a:latin typeface="Calibri"/>
+              </a:rPr>
               <a:t>[x] Next.js Control Room Frontend:</a:t>
             </a:r>
           </a:p>
@@ -5204,6 +5264,9 @@
               </a:defRPr>
             </a:pPr>
             <a:r>
+              <a:rPr>
+                <a:latin typeface="Calibri"/>
+              </a:rPr>
               <a:t>    Running on http://localhost:3000 (Interactive, 30 Hz WebSockets).</a:t>
             </a:r>
           </a:p>
@@ -5233,6 +5296,9 @@
               </a:defRPr>
             </a:pPr>
             <a:r>
+              <a:rPr>
+                <a:latin typeface="Calibri"/>
+              </a:rPr>
               <a:t>[x] Live Video / CCTV Edge Detection:</a:t>
             </a:r>
           </a:p>
@@ -5249,6 +5315,9 @@
               </a:defRPr>
             </a:pPr>
             <a:r>
+              <a:rPr>
+                <a:latin typeface="Calibri"/>
+              </a:rPr>
               <a:t>    Uploading traffic video frames triggers real-time YOLOv8 bounding boxes, homography ground projection, and queue updates.</a:t>
             </a:r>
           </a:p>
@@ -5278,6 +5347,9 @@
               </a:defRPr>
             </a:pPr>
             <a:r>
+              <a:rPr>
+                <a:latin typeface="Calibri"/>
+              </a:rPr>
               <a:t>[x] Demand-Responsive Actuation:</a:t>
             </a:r>
           </a:p>
@@ -5294,6 +5366,9 @@
               </a:defRPr>
             </a:pPr>
             <a:r>
+              <a:rPr>
+                <a:latin typeface="Calibri"/>
+              </a:rPr>
               <a:t>    Adjusting approach volume dynamically extends or truncates green duration within [10s, 60s].</a:t>
             </a:r>
           </a:p>
@@ -5323,6 +5398,9 @@
               </a:defRPr>
             </a:pPr>
             <a:r>
+              <a:rPr>
+                <a:latin typeface="Calibri"/>
+              </a:rPr>
               <a:t>[x] 108 Emergency Preemption Trigger:</a:t>
             </a:r>
           </a:p>
@@ -5339,6 +5417,9 @@
               </a:defRPr>
             </a:pPr>
             <a:r>
+              <a:rPr>
+                <a:latin typeface="Calibri"/>
+              </a:rPr>
               <a:t>    Injecting an ambulance elevates priority score to 3000.0, forces immediate green, and pre-clears 3 downstream junctions.</a:t>
             </a:r>
           </a:p>
@@ -5397,6 +5478,9 @@
               </a:defRPr>
             </a:pPr>
             <a:r>
+              <a:rPr>
+                <a:latin typeface="Calibri"/>
+              </a:rPr>
               <a:t>Execution Runbook &amp; Test Audit</a:t>
             </a:r>
           </a:p>
@@ -5413,6 +5497,9 @@
               </a:defRPr>
             </a:pPr>
             <a:r>
+              <a:rPr>
+                <a:latin typeface="Calibri"/>
+              </a:rPr>
               <a:t>1. Terminal Commands for Demonstration:</a:t>
             </a:r>
           </a:p>
@@ -5429,6 +5516,9 @@
               </a:defRPr>
             </a:pPr>
             <a:r>
+              <a:rPr>
+                <a:latin typeface="Calibri"/>
+              </a:rPr>
               <a:t>   # Start FastAPI Edge Gateway</a:t>
             </a:r>
           </a:p>
@@ -5445,6 +5535,9 @@
               </a:defRPr>
             </a:pPr>
             <a:r>
+              <a:rPr>
+                <a:latin typeface="Calibri"/>
+              </a:rPr>
               <a:t>   python3 -m uvicorn edge_gateway:app --host 0.0.0.0 --port 8000 --reload</a:t>
             </a:r>
           </a:p>
@@ -5474,6 +5567,9 @@
               </a:defRPr>
             </a:pPr>
             <a:r>
+              <a:rPr>
+                <a:latin typeface="Calibri"/>
+              </a:rPr>
               <a:t>   # Start Next.js Control Room</a:t>
             </a:r>
           </a:p>
@@ -5490,6 +5586,9 @@
               </a:defRPr>
             </a:pPr>
             <a:r>
+              <a:rPr>
+                <a:latin typeface="Calibri"/>
+              </a:rPr>
               <a:t>   npm run dev  (Access on http://localhost:3000)</a:t>
             </a:r>
           </a:p>
@@ -5519,6 +5618,9 @@
               </a:defRPr>
             </a:pPr>
             <a:r>
+              <a:rPr>
+                <a:latin typeface="Calibri"/>
+              </a:rPr>
               <a:t>   # Run Master End-to-End Simulation Pipeline</a:t>
             </a:r>
           </a:p>
@@ -5535,6 +5637,9 @@
               </a:defRPr>
             </a:pPr>
             <a:r>
+              <a:rPr>
+                <a:latin typeface="Calibri"/>
+              </a:rPr>
               <a:t>   python3 run_end_to_end.py</a:t>
             </a:r>
           </a:p>
@@ -5564,6 +5669,9 @@
               </a:defRPr>
             </a:pPr>
             <a:r>
+              <a:rPr>
+                <a:latin typeface="Calibri"/>
+              </a:rPr>
               <a:t>2. Automated Test Suite Audit (113 Passing Tests):</a:t>
             </a:r>
           </a:p>
@@ -5580,6 +5688,9 @@
               </a:defRPr>
             </a:pPr>
             <a:r>
+              <a:rPr>
+                <a:latin typeface="Calibri"/>
+              </a:rPr>
               <a:t>   pytest -v</a:t>
             </a:r>
           </a:p>
@@ -5596,39 +5707,48 @@
               </a:defRPr>
             </a:pPr>
             <a:r>
-              <a:t>   • 113 passed in 4.82s across all 9 test suites.</a:t>
-            </a:r>
-          </a:p>
-          <a:p>
-            <a:pPr>
-              <a:spcAft>
-                <a:spcPts val="600"/>
-              </a:spcAft>
-              <a:defRPr sz="1200">
-                <a:solidFill>
-                  <a:srgbClr val="F8FAFC"/>
-                </a:solidFill>
-                <a:latin typeface="Calibri"/>
-              </a:defRPr>
-            </a:pPr>
-            <a:r>
-              <a:t>   • SC1, SC2, SC3, and SC4 verified automatically.</a:t>
-            </a:r>
-          </a:p>
-          <a:p>
-            <a:pPr>
-              <a:spcAft>
-                <a:spcPts val="600"/>
-              </a:spcAft>
-              <a:defRPr sz="1200">
-                <a:solidFill>
-                  <a:srgbClr val="F8FAFC"/>
-                </a:solidFill>
-                <a:latin typeface="Calibri"/>
-              </a:defRPr>
-            </a:pPr>
-            <a:r>
-              <a:t>   • Supervised by: Dr. R. Krithiga (krithiga.r@vit.ac.in)</a:t>
+              <a:rPr>
+                <a:latin typeface="Calibri"/>
+              </a:rPr>
+              <a:t>   - 113 passed in 4.82s across all 9 test suites.</a:t>
+            </a:r>
+          </a:p>
+          <a:p>
+            <a:pPr>
+              <a:spcAft>
+                <a:spcPts val="600"/>
+              </a:spcAft>
+              <a:defRPr sz="1200">
+                <a:solidFill>
+                  <a:srgbClr val="F8FAFC"/>
+                </a:solidFill>
+                <a:latin typeface="Calibri"/>
+              </a:defRPr>
+            </a:pPr>
+            <a:r>
+              <a:rPr>
+                <a:latin typeface="Calibri"/>
+              </a:rPr>
+              <a:t>   - SC1, SC2, SC3, and SC4 verified automatically.</a:t>
+            </a:r>
+          </a:p>
+          <a:p>
+            <a:pPr>
+              <a:spcAft>
+                <a:spcPts val="600"/>
+              </a:spcAft>
+              <a:defRPr sz="1200">
+                <a:solidFill>
+                  <a:srgbClr val="F8FAFC"/>
+                </a:solidFill>
+                <a:latin typeface="Calibri"/>
+              </a:defRPr>
+            </a:pPr>
+            <a:r>
+              <a:rPr>
+                <a:latin typeface="Calibri"/>
+              </a:rPr>
+              <a:t>   - Supervised by: Dr. R. Krithiga (krithiga.r@vit.ac.in)</a:t>
             </a:r>
           </a:p>
         </p:txBody>
@@ -5727,6 +5847,9 @@
               </a:defRPr>
             </a:pPr>
             <a:r>
+              <a:rPr>
+                <a:latin typeface="Calibri"/>
+              </a:rPr>
               <a:t>EMPIRICAL RESULTS: BENCHMARKS</a:t>
             </a:r>
           </a:p>
@@ -5763,6 +5886,9 @@
               </a:defRPr>
             </a:pPr>
             <a:r>
+              <a:rPr>
+                <a:latin typeface="Calibri"/>
+              </a:rPr>
               <a:t>Latency, Precision, and Actuation Benchmarks (SC1, SC2, SC3)</a:t>
             </a:r>
           </a:p>
@@ -5799,6 +5925,9 @@
               </a:defRPr>
             </a:pPr>
             <a:r>
+              <a:rPr>
+                <a:latin typeface="Calibri"/>
+              </a:rPr>
               <a:t>Quantitative evaluation on commodity CPU hardware demonstrating real-time edge viability</a:t>
             </a:r>
           </a:p>
@@ -5857,6 +5986,9 @@
               </a:defRPr>
             </a:pPr>
             <a:r>
+              <a:rPr>
+                <a:latin typeface="Calibri"/>
+              </a:rPr>
               <a:t>Edge Vision Throughput</a:t>
             </a:r>
           </a:p>
@@ -5873,115 +6005,136 @@
               </a:defRPr>
             </a:pPr>
             <a:r>
-              <a:t>• Frame Ingestion: 2.1 ms</a:t>
-            </a:r>
-          </a:p>
-          <a:p>
-            <a:pPr>
-              <a:spcAft>
-                <a:spcPts val="600"/>
-              </a:spcAft>
-              <a:defRPr sz="1200">
-                <a:solidFill>
-                  <a:srgbClr val="F8FAFC"/>
-                </a:solidFill>
-                <a:latin typeface="Calibri"/>
-              </a:defRPr>
-            </a:pPr>
-            <a:r>
-              <a:t>• Preprocessing: 0.8 ms</a:t>
-            </a:r>
-          </a:p>
-          <a:p>
-            <a:pPr>
-              <a:spcAft>
-                <a:spcPts val="600"/>
-              </a:spcAft>
-              <a:defRPr sz="1200">
-                <a:solidFill>
-                  <a:srgbClr val="F8FAFC"/>
-                </a:solidFill>
-                <a:latin typeface="Calibri"/>
-              </a:defRPr>
-            </a:pPr>
-            <a:r>
-              <a:t>• YOLOv8n ONNX: 18.0 ms (55.5 FPS)</a:t>
-            </a:r>
-          </a:p>
-          <a:p>
-            <a:pPr>
-              <a:spcAft>
-                <a:spcPts val="600"/>
-              </a:spcAft>
-              <a:defRPr sz="1200">
-                <a:solidFill>
-                  <a:srgbClr val="F8FAFC"/>
-                </a:solidFill>
-                <a:latin typeface="Calibri"/>
-              </a:defRPr>
-            </a:pPr>
-            <a:r>
-              <a:t>• Planar Homography: 0.4 ms</a:t>
-            </a:r>
-          </a:p>
-          <a:p>
-            <a:pPr>
-              <a:spcAft>
-                <a:spcPts val="600"/>
-              </a:spcAft>
-              <a:defRPr sz="1200">
-                <a:solidFill>
-                  <a:srgbClr val="F8FAFC"/>
-                </a:solidFill>
-                <a:latin typeface="Calibri"/>
-              </a:defRPr>
-            </a:pPr>
-            <a:r>
-              <a:t>• HSV Classifier: 0.6 ms</a:t>
-            </a:r>
-          </a:p>
-          <a:p>
-            <a:pPr>
-              <a:spcAft>
-                <a:spcPts val="600"/>
-              </a:spcAft>
-              <a:defRPr sz="1200">
-                <a:solidFill>
-                  <a:srgbClr val="F8FAFC"/>
-                </a:solidFill>
-                <a:latin typeface="Calibri"/>
-              </a:defRPr>
-            </a:pPr>
-            <a:r>
-              <a:t>• Total Latency: 21.9 ms (45.6 FPS)</a:t>
-            </a:r>
-          </a:p>
-          <a:p>
-            <a:pPr>
-              <a:spcAft>
-                <a:spcPts val="600"/>
-              </a:spcAft>
-              <a:defRPr sz="1200">
-                <a:solidFill>
-                  <a:srgbClr val="F8FAFC"/>
-                </a:solidFill>
-                <a:latin typeface="Calibri"/>
-              </a:defRPr>
-            </a:pPr>
-          </a:p>
-          <a:p>
-            <a:pPr>
-              <a:spcAft>
-                <a:spcPts val="600"/>
-              </a:spcAft>
-              <a:defRPr sz="1200">
-                <a:solidFill>
-                  <a:srgbClr val="F8FAFC"/>
-                </a:solidFill>
-                <a:latin typeface="Calibri"/>
-              </a:defRPr>
-            </a:pPr>
-            <a:r>
+              <a:rPr>
+                <a:latin typeface="Calibri"/>
+              </a:rPr>
+              <a:t>- Frame Ingestion: 2.1 ms</a:t>
+            </a:r>
+          </a:p>
+          <a:p>
+            <a:pPr>
+              <a:spcAft>
+                <a:spcPts val="600"/>
+              </a:spcAft>
+              <a:defRPr sz="1200">
+                <a:solidFill>
+                  <a:srgbClr val="F8FAFC"/>
+                </a:solidFill>
+                <a:latin typeface="Calibri"/>
+              </a:defRPr>
+            </a:pPr>
+            <a:r>
+              <a:rPr>
+                <a:latin typeface="Calibri"/>
+              </a:rPr>
+              <a:t>- Preprocessing: 0.8 ms</a:t>
+            </a:r>
+          </a:p>
+          <a:p>
+            <a:pPr>
+              <a:spcAft>
+                <a:spcPts val="600"/>
+              </a:spcAft>
+              <a:defRPr sz="1200">
+                <a:solidFill>
+                  <a:srgbClr val="F8FAFC"/>
+                </a:solidFill>
+                <a:latin typeface="Calibri"/>
+              </a:defRPr>
+            </a:pPr>
+            <a:r>
+              <a:rPr>
+                <a:latin typeface="Calibri"/>
+              </a:rPr>
+              <a:t>- YOLOv8n ONNX: 18.0 ms (55.5 FPS)</a:t>
+            </a:r>
+          </a:p>
+          <a:p>
+            <a:pPr>
+              <a:spcAft>
+                <a:spcPts val="600"/>
+              </a:spcAft>
+              <a:defRPr sz="1200">
+                <a:solidFill>
+                  <a:srgbClr val="F8FAFC"/>
+                </a:solidFill>
+                <a:latin typeface="Calibri"/>
+              </a:defRPr>
+            </a:pPr>
+            <a:r>
+              <a:rPr>
+                <a:latin typeface="Calibri"/>
+              </a:rPr>
+              <a:t>- Planar Homography: 0.4 ms</a:t>
+            </a:r>
+          </a:p>
+          <a:p>
+            <a:pPr>
+              <a:spcAft>
+                <a:spcPts val="600"/>
+              </a:spcAft>
+              <a:defRPr sz="1200">
+                <a:solidFill>
+                  <a:srgbClr val="F8FAFC"/>
+                </a:solidFill>
+                <a:latin typeface="Calibri"/>
+              </a:defRPr>
+            </a:pPr>
+            <a:r>
+              <a:rPr>
+                <a:latin typeface="Calibri"/>
+              </a:rPr>
+              <a:t>- HSV Classifier: 0.6 ms</a:t>
+            </a:r>
+          </a:p>
+          <a:p>
+            <a:pPr>
+              <a:spcAft>
+                <a:spcPts val="600"/>
+              </a:spcAft>
+              <a:defRPr sz="1200">
+                <a:solidFill>
+                  <a:srgbClr val="F8FAFC"/>
+                </a:solidFill>
+                <a:latin typeface="Calibri"/>
+              </a:defRPr>
+            </a:pPr>
+            <a:r>
+              <a:rPr>
+                <a:latin typeface="Calibri"/>
+              </a:rPr>
+              <a:t>- Total Latency: 21.9 ms (45.6 FPS)</a:t>
+            </a:r>
+          </a:p>
+          <a:p>
+            <a:pPr>
+              <a:spcAft>
+                <a:spcPts val="600"/>
+              </a:spcAft>
+              <a:defRPr sz="1200">
+                <a:solidFill>
+                  <a:srgbClr val="F8FAFC"/>
+                </a:solidFill>
+                <a:latin typeface="Calibri"/>
+              </a:defRPr>
+            </a:pPr>
+          </a:p>
+          <a:p>
+            <a:pPr>
+              <a:spcAft>
+                <a:spcPts val="600"/>
+              </a:spcAft>
+              <a:defRPr sz="1200">
+                <a:solidFill>
+                  <a:srgbClr val="F8FAFC"/>
+                </a:solidFill>
+                <a:latin typeface="Calibri"/>
+              </a:defRPr>
+            </a:pPr>
+            <a:r>
+              <a:rPr>
+                <a:latin typeface="Calibri"/>
+              </a:rPr>
               <a:t>Classifier Accuracy (N = 200):</a:t>
             </a:r>
           </a:p>
@@ -5998,39 +6151,48 @@
               </a:defRPr>
             </a:pPr>
             <a:r>
-              <a:t>• Emergency Recall: 97.0%</a:t>
-            </a:r>
-          </a:p>
-          <a:p>
-            <a:pPr>
-              <a:spcAft>
-                <a:spcPts val="600"/>
-              </a:spcAft>
-              <a:defRPr sz="1200">
-                <a:solidFill>
-                  <a:srgbClr val="F8FAFC"/>
-                </a:solidFill>
-                <a:latin typeface="Calibri"/>
-              </a:defRPr>
-            </a:pPr>
-            <a:r>
-              <a:t>• Emergency Precision: 100.0%</a:t>
-            </a:r>
-          </a:p>
-          <a:p>
-            <a:pPr>
-              <a:spcAft>
-                <a:spcPts val="600"/>
-              </a:spcAft>
-              <a:defRPr sz="1200">
-                <a:solidFill>
-                  <a:srgbClr val="F8FAFC"/>
-                </a:solidFill>
-                <a:latin typeface="Calibri"/>
-              </a:defRPr>
-            </a:pPr>
-            <a:r>
-              <a:t>• Civilian False Positives: 0.0%</a:t>
+              <a:rPr>
+                <a:latin typeface="Calibri"/>
+              </a:rPr>
+              <a:t>- Emergency Recall: 97.0%</a:t>
+            </a:r>
+          </a:p>
+          <a:p>
+            <a:pPr>
+              <a:spcAft>
+                <a:spcPts val="600"/>
+              </a:spcAft>
+              <a:defRPr sz="1200">
+                <a:solidFill>
+                  <a:srgbClr val="F8FAFC"/>
+                </a:solidFill>
+                <a:latin typeface="Calibri"/>
+              </a:defRPr>
+            </a:pPr>
+            <a:r>
+              <a:rPr>
+                <a:latin typeface="Calibri"/>
+              </a:rPr>
+              <a:t>- Emergency Precision: 100.0%</a:t>
+            </a:r>
+          </a:p>
+          <a:p>
+            <a:pPr>
+              <a:spcAft>
+                <a:spcPts val="600"/>
+              </a:spcAft>
+              <a:defRPr sz="1200">
+                <a:solidFill>
+                  <a:srgbClr val="F8FAFC"/>
+                </a:solidFill>
+                <a:latin typeface="Calibri"/>
+              </a:defRPr>
+            </a:pPr>
+            <a:r>
+              <a:rPr>
+                <a:latin typeface="Calibri"/>
+              </a:rPr>
+              <a:t>- Civilian False Positives: 0.0%</a:t>
             </a:r>
           </a:p>
         </p:txBody>
@@ -6088,6 +6250,9 @@
               </a:defRPr>
             </a:pPr>
             <a:r>
+              <a:rPr>
+                <a:latin typeface="Calibri"/>
+              </a:rPr>
               <a:t>Priority Max-Heap (SC2)</a:t>
             </a:r>
           </a:p>
@@ -6104,6 +6269,9 @@
               </a:defRPr>
             </a:pPr>
             <a:r>
+              <a:rPr>
+                <a:latin typeface="Calibri"/>
+              </a:rPr>
               <a:t>Operational Scaling Benchmarks:</a:t>
             </a:r>
           </a:p>
@@ -6120,83 +6288,98 @@
               </a:defRPr>
             </a:pPr>
             <a:r>
-              <a:t>• 4 Lanes: 0.00075 ms (750 ns)</a:t>
-            </a:r>
-          </a:p>
-          <a:p>
-            <a:pPr>
-              <a:spcAft>
-                <a:spcPts val="600"/>
-              </a:spcAft>
-              <a:defRPr sz="1200">
-                <a:solidFill>
-                  <a:srgbClr val="F8FAFC"/>
-                </a:solidFill>
-                <a:latin typeface="Calibri"/>
-              </a:defRPr>
-            </a:pPr>
-            <a:r>
-              <a:t>• 8 Lanes: 0.00040 ms (400 ns)</a:t>
-            </a:r>
-          </a:p>
-          <a:p>
-            <a:pPr>
-              <a:spcAft>
-                <a:spcPts val="600"/>
-              </a:spcAft>
-              <a:defRPr sz="1200">
-                <a:solidFill>
-                  <a:srgbClr val="F8FAFC"/>
-                </a:solidFill>
-                <a:latin typeface="Calibri"/>
-              </a:defRPr>
-            </a:pPr>
-            <a:r>
-              <a:t>• 16 Lanes: 0.00034 ms (340 ns)</a:t>
-            </a:r>
-          </a:p>
-          <a:p>
-            <a:pPr>
-              <a:spcAft>
-                <a:spcPts val="600"/>
-              </a:spcAft>
-              <a:defRPr sz="1200">
-                <a:solidFill>
-                  <a:srgbClr val="F8FAFC"/>
-                </a:solidFill>
-                <a:latin typeface="Calibri"/>
-              </a:defRPr>
-            </a:pPr>
-            <a:r>
-              <a:t>• 32 Lanes: 0.00029 ms (290 ns)</a:t>
-            </a:r>
-          </a:p>
-          <a:p>
-            <a:pPr>
-              <a:spcAft>
-                <a:spcPts val="600"/>
-              </a:spcAft>
-              <a:defRPr sz="1200">
-                <a:solidFill>
-                  <a:srgbClr val="F8FAFC"/>
-                </a:solidFill>
-                <a:latin typeface="Calibri"/>
-              </a:defRPr>
-            </a:pPr>
-          </a:p>
-          <a:p>
-            <a:pPr>
-              <a:spcAft>
-                <a:spcPts val="600"/>
-              </a:spcAft>
-              <a:defRPr sz="1200">
-                <a:solidFill>
-                  <a:srgbClr val="F8FAFC"/>
-                </a:solidFill>
-                <a:latin typeface="Calibri"/>
-              </a:defRPr>
-            </a:pPr>
-            <a:r>
+              <a:rPr>
+                <a:latin typeface="Calibri"/>
+              </a:rPr>
+              <a:t>- 4 Lanes: 0.00075 ms (750 ns)</a:t>
+            </a:r>
+          </a:p>
+          <a:p>
+            <a:pPr>
+              <a:spcAft>
+                <a:spcPts val="600"/>
+              </a:spcAft>
+              <a:defRPr sz="1200">
+                <a:solidFill>
+                  <a:srgbClr val="F8FAFC"/>
+                </a:solidFill>
+                <a:latin typeface="Calibri"/>
+              </a:defRPr>
+            </a:pPr>
+            <a:r>
+              <a:rPr>
+                <a:latin typeface="Calibri"/>
+              </a:rPr>
+              <a:t>- 8 Lanes: 0.00040 ms (400 ns)</a:t>
+            </a:r>
+          </a:p>
+          <a:p>
+            <a:pPr>
+              <a:spcAft>
+                <a:spcPts val="600"/>
+              </a:spcAft>
+              <a:defRPr sz="1200">
+                <a:solidFill>
+                  <a:srgbClr val="F8FAFC"/>
+                </a:solidFill>
+                <a:latin typeface="Calibri"/>
+              </a:defRPr>
+            </a:pPr>
+            <a:r>
+              <a:rPr>
+                <a:latin typeface="Calibri"/>
+              </a:rPr>
+              <a:t>- 16 Lanes: 0.00034 ms (340 ns)</a:t>
+            </a:r>
+          </a:p>
+          <a:p>
+            <a:pPr>
+              <a:spcAft>
+                <a:spcPts val="600"/>
+              </a:spcAft>
+              <a:defRPr sz="1200">
+                <a:solidFill>
+                  <a:srgbClr val="F8FAFC"/>
+                </a:solidFill>
+                <a:latin typeface="Calibri"/>
+              </a:defRPr>
+            </a:pPr>
+            <a:r>
+              <a:rPr>
+                <a:latin typeface="Calibri"/>
+              </a:rPr>
+              <a:t>- 32 Lanes: 0.00029 ms (290 ns)</a:t>
+            </a:r>
+          </a:p>
+          <a:p>
+            <a:pPr>
+              <a:spcAft>
+                <a:spcPts val="600"/>
+              </a:spcAft>
+              <a:defRPr sz="1200">
+                <a:solidFill>
+                  <a:srgbClr val="F8FAFC"/>
+                </a:solidFill>
+                <a:latin typeface="Calibri"/>
+              </a:defRPr>
+            </a:pPr>
+          </a:p>
+          <a:p>
+            <a:pPr>
+              <a:spcAft>
+                <a:spcPts val="600"/>
+              </a:spcAft>
+              <a:defRPr sz="1200">
+                <a:solidFill>
+                  <a:srgbClr val="F8FAFC"/>
+                </a:solidFill>
+                <a:latin typeface="Calibri"/>
+              </a:defRPr>
+            </a:pPr>
+            <a:r>
+              <a:rPr>
+                <a:latin typeface="Calibri"/>
+              </a:rPr>
               <a:t>Real-Time Margin:</a:t>
             </a:r>
           </a:p>
@@ -6213,39 +6396,48 @@
               </a:defRPr>
             </a:pPr>
             <a:r>
-              <a:t>• 1333x faster than 1.0 ms deadline.</a:t>
-            </a:r>
-          </a:p>
-          <a:p>
-            <a:pPr>
-              <a:spcAft>
-                <a:spcPts val="600"/>
-              </a:spcAft>
-              <a:defRPr sz="1200">
-                <a:solidFill>
-                  <a:srgbClr val="F8FAFC"/>
-                </a:solidFill>
-                <a:latin typeface="Calibri"/>
-              </a:defRPr>
-            </a:pPr>
-            <a:r>
-              <a:t>• Amortized O(1) peek/pop.</a:t>
-            </a:r>
-          </a:p>
-          <a:p>
-            <a:pPr>
-              <a:spcAft>
-                <a:spcPts val="600"/>
-              </a:spcAft>
-              <a:defRPr sz="1200">
-                <a:solidFill>
-                  <a:srgbClr val="F8FAFC"/>
-                </a:solidFill>
-                <a:latin typeface="Calibri"/>
-              </a:defRPr>
-            </a:pPr>
-            <a:r>
-              <a:t>• Emergency vehicle achieves Score = 3000.0, seizing heap root.</a:t>
+              <a:rPr>
+                <a:latin typeface="Calibri"/>
+              </a:rPr>
+              <a:t>- 1333x faster than 1.0 ms deadline.</a:t>
+            </a:r>
+          </a:p>
+          <a:p>
+            <a:pPr>
+              <a:spcAft>
+                <a:spcPts val="600"/>
+              </a:spcAft>
+              <a:defRPr sz="1200">
+                <a:solidFill>
+                  <a:srgbClr val="F8FAFC"/>
+                </a:solidFill>
+                <a:latin typeface="Calibri"/>
+              </a:defRPr>
+            </a:pPr>
+            <a:r>
+              <a:rPr>
+                <a:latin typeface="Calibri"/>
+              </a:rPr>
+              <a:t>- Amortized O(1) peek/pop.</a:t>
+            </a:r>
+          </a:p>
+          <a:p>
+            <a:pPr>
+              <a:spcAft>
+                <a:spcPts val="600"/>
+              </a:spcAft>
+              <a:defRPr sz="1200">
+                <a:solidFill>
+                  <a:srgbClr val="F8FAFC"/>
+                </a:solidFill>
+                <a:latin typeface="Calibri"/>
+              </a:defRPr>
+            </a:pPr>
+            <a:r>
+              <a:rPr>
+                <a:latin typeface="Calibri"/>
+              </a:rPr>
+              <a:t>- Emergency vehicle achieves Score = 3000.0, seizing heap root.</a:t>
             </a:r>
           </a:p>
         </p:txBody>
@@ -6303,6 +6495,9 @@
               </a:defRPr>
             </a:pPr>
             <a:r>
+              <a:rPr>
+                <a:latin typeface="Calibri"/>
+              </a:rPr>
               <a:t>Actuation &amp; Corridor (SC1, SC3)</a:t>
             </a:r>
           </a:p>
@@ -6319,6 +6514,9 @@
               </a:defRPr>
             </a:pPr>
             <a:r>
+              <a:rPr>
+                <a:latin typeface="Calibri"/>
+              </a:rPr>
               <a:t>SC1 Green Scaling (q -&gt; g):</a:t>
             </a:r>
           </a:p>
@@ -6335,99 +6533,117 @@
               </a:defRPr>
             </a:pPr>
             <a:r>
-              <a:t>• q = 0.0m -&gt; g = 10.0s (min bound)</a:t>
-            </a:r>
-          </a:p>
-          <a:p>
-            <a:pPr>
-              <a:spcAft>
-                <a:spcPts val="600"/>
-              </a:spcAft>
-              <a:defRPr sz="1200">
-                <a:solidFill>
-                  <a:srgbClr val="F8FAFC"/>
-                </a:solidFill>
-                <a:latin typeface="Calibri"/>
-              </a:defRPr>
-            </a:pPr>
-            <a:r>
-              <a:t>• q = 35.0m -&gt; g = 11.5s</a:t>
-            </a:r>
-          </a:p>
-          <a:p>
-            <a:pPr>
-              <a:spcAft>
-                <a:spcPts val="600"/>
-              </a:spcAft>
-              <a:defRPr sz="1200">
-                <a:solidFill>
-                  <a:srgbClr val="F8FAFC"/>
-                </a:solidFill>
-                <a:latin typeface="Calibri"/>
-              </a:defRPr>
-            </a:pPr>
-            <a:r>
-              <a:t>• q = 140.0m -&gt; g = 39.9s</a:t>
-            </a:r>
-          </a:p>
-          <a:p>
-            <a:pPr>
-              <a:spcAft>
-                <a:spcPts val="600"/>
-              </a:spcAft>
-              <a:defRPr sz="1200">
-                <a:solidFill>
-                  <a:srgbClr val="F8FAFC"/>
-                </a:solidFill>
-                <a:latin typeface="Calibri"/>
-              </a:defRPr>
-            </a:pPr>
-            <a:r>
-              <a:t>• q = 350.0m -&gt; g = 60.0s (max bound)</a:t>
-            </a:r>
-          </a:p>
-          <a:p>
-            <a:pPr>
-              <a:spcAft>
-                <a:spcPts val="600"/>
-              </a:spcAft>
-              <a:defRPr sz="1200">
-                <a:solidFill>
-                  <a:srgbClr val="F8FAFC"/>
-                </a:solidFill>
-                <a:latin typeface="Calibri"/>
-              </a:defRPr>
-            </a:pPr>
-            <a:r>
-              <a:t>• SC1 PASSED: Strict monotonic scaling.</a:t>
-            </a:r>
-          </a:p>
-          <a:p>
-            <a:pPr>
-              <a:spcAft>
-                <a:spcPts val="600"/>
-              </a:spcAft>
-              <a:defRPr sz="1200">
-                <a:solidFill>
-                  <a:srgbClr val="F8FAFC"/>
-                </a:solidFill>
-                <a:latin typeface="Calibri"/>
-              </a:defRPr>
-            </a:pPr>
-          </a:p>
-          <a:p>
-            <a:pPr>
-              <a:spcAft>
-                <a:spcPts val="600"/>
-              </a:spcAft>
-              <a:defRPr sz="1200">
-                <a:solidFill>
-                  <a:srgbClr val="F8FAFC"/>
-                </a:solidFill>
-                <a:latin typeface="Calibri"/>
-              </a:defRPr>
-            </a:pPr>
-            <a:r>
+              <a:rPr>
+                <a:latin typeface="Calibri"/>
+              </a:rPr>
+              <a:t>- q = 0.0m -&gt; g = 10.0s (min bound)</a:t>
+            </a:r>
+          </a:p>
+          <a:p>
+            <a:pPr>
+              <a:spcAft>
+                <a:spcPts val="600"/>
+              </a:spcAft>
+              <a:defRPr sz="1200">
+                <a:solidFill>
+                  <a:srgbClr val="F8FAFC"/>
+                </a:solidFill>
+                <a:latin typeface="Calibri"/>
+              </a:defRPr>
+            </a:pPr>
+            <a:r>
+              <a:rPr>
+                <a:latin typeface="Calibri"/>
+              </a:rPr>
+              <a:t>- q = 35.0m -&gt; g = 11.5s</a:t>
+            </a:r>
+          </a:p>
+          <a:p>
+            <a:pPr>
+              <a:spcAft>
+                <a:spcPts val="600"/>
+              </a:spcAft>
+              <a:defRPr sz="1200">
+                <a:solidFill>
+                  <a:srgbClr val="F8FAFC"/>
+                </a:solidFill>
+                <a:latin typeface="Calibri"/>
+              </a:defRPr>
+            </a:pPr>
+            <a:r>
+              <a:rPr>
+                <a:latin typeface="Calibri"/>
+              </a:rPr>
+              <a:t>- q = 140.0m -&gt; g = 39.9s</a:t>
+            </a:r>
+          </a:p>
+          <a:p>
+            <a:pPr>
+              <a:spcAft>
+                <a:spcPts val="600"/>
+              </a:spcAft>
+              <a:defRPr sz="1200">
+                <a:solidFill>
+                  <a:srgbClr val="F8FAFC"/>
+                </a:solidFill>
+                <a:latin typeface="Calibri"/>
+              </a:defRPr>
+            </a:pPr>
+            <a:r>
+              <a:rPr>
+                <a:latin typeface="Calibri"/>
+              </a:rPr>
+              <a:t>- q = 350.0m -&gt; g = 60.0s (max bound)</a:t>
+            </a:r>
+          </a:p>
+          <a:p>
+            <a:pPr>
+              <a:spcAft>
+                <a:spcPts val="600"/>
+              </a:spcAft>
+              <a:defRPr sz="1200">
+                <a:solidFill>
+                  <a:srgbClr val="F8FAFC"/>
+                </a:solidFill>
+                <a:latin typeface="Calibri"/>
+              </a:defRPr>
+            </a:pPr>
+            <a:r>
+              <a:rPr>
+                <a:latin typeface="Calibri"/>
+              </a:rPr>
+              <a:t>- SC1 PASSED: Strict monotonic scaling.</a:t>
+            </a:r>
+          </a:p>
+          <a:p>
+            <a:pPr>
+              <a:spcAft>
+                <a:spcPts val="600"/>
+              </a:spcAft>
+              <a:defRPr sz="1200">
+                <a:solidFill>
+                  <a:srgbClr val="F8FAFC"/>
+                </a:solidFill>
+                <a:latin typeface="Calibri"/>
+              </a:defRPr>
+            </a:pPr>
+          </a:p>
+          <a:p>
+            <a:pPr>
+              <a:spcAft>
+                <a:spcPts val="600"/>
+              </a:spcAft>
+              <a:defRPr sz="1200">
+                <a:solidFill>
+                  <a:srgbClr val="F8FAFC"/>
+                </a:solidFill>
+                <a:latin typeface="Calibri"/>
+              </a:defRPr>
+            </a:pPr>
+            <a:r>
+              <a:rPr>
+                <a:latin typeface="Calibri"/>
+              </a:rPr>
               <a:t>SC3 Corridor Preclearance:</a:t>
             </a:r>
           </a:p>
@@ -6444,23 +6660,29 @@
               </a:defRPr>
             </a:pPr>
             <a:r>
-              <a:t>• 3 downstream preemption signals emitted for IX-02, IX-03, IX-04.</a:t>
-            </a:r>
-          </a:p>
-          <a:p>
-            <a:pPr>
-              <a:spcAft>
-                <a:spcPts val="600"/>
-              </a:spcAft>
-              <a:defRPr sz="1200">
-                <a:solidFill>
-                  <a:srgbClr val="F8FAFC"/>
-                </a:solidFill>
-                <a:latin typeface="Calibri"/>
-              </a:defRPr>
-            </a:pPr>
-            <a:r>
-              <a:t>• SC3 PASSED: Multi-junction green wave.</a:t>
+              <a:rPr>
+                <a:latin typeface="Calibri"/>
+              </a:rPr>
+              <a:t>- 3 downstream preemption signals emitted for IX-02, IX-03, IX-04.</a:t>
+            </a:r>
+          </a:p>
+          <a:p>
+            <a:pPr>
+              <a:spcAft>
+                <a:spcPts val="600"/>
+              </a:spcAft>
+              <a:defRPr sz="1200">
+                <a:solidFill>
+                  <a:srgbClr val="F8FAFC"/>
+                </a:solidFill>
+                <a:latin typeface="Calibri"/>
+              </a:defRPr>
+            </a:pPr>
+            <a:r>
+              <a:rPr>
+                <a:latin typeface="Calibri"/>
+              </a:rPr>
+              <a:t>- SC3 PASSED: Multi-junction green wave.</a:t>
             </a:r>
           </a:p>
         </p:txBody>
@@ -6559,6 +6781,9 @@
               </a:defRPr>
             </a:pPr>
             <a:r>
+              <a:rPr>
+                <a:latin typeface="Calibri"/>
+              </a:rPr>
               <a:t>STATISTICAL HYPOTHESIS TESTING (SC4)</a:t>
             </a:r>
           </a:p>
@@ -6595,6 +6820,9 @@
               </a:defRPr>
             </a:pPr>
             <a:r>
+              <a:rPr>
+                <a:latin typeface="Calibri"/>
+              </a:rPr>
               <a:t>Formal Non-Parametric Proof Over Fixed-Timer Baseline</a:t>
             </a:r>
           </a:p>
@@ -6631,6 +6859,9 @@
               </a:defRPr>
             </a:pPr>
             <a:r>
+              <a:rPr>
+                <a:latin typeface="Calibri"/>
+              </a:rPr>
               <a:t>Decisive rejection of null hypothesis across 480 paired simulation cycles</a:t>
             </a:r>
           </a:p>
@@ -6689,6 +6920,9 @@
               </a:defRPr>
             </a:pPr>
             <a:r>
+              <a:rPr>
+                <a:latin typeface="Calibri"/>
+              </a:rPr>
               <a:t>Mann-Whitney U Test Outcomes</a:t>
             </a:r>
           </a:p>
@@ -6705,6 +6939,9 @@
               </a:defRPr>
             </a:pPr>
             <a:r>
+              <a:rPr>
+                <a:latin typeface="Calibri"/>
+              </a:rPr>
               <a:t>1. Experimental Protocol:</a:t>
             </a:r>
           </a:p>
@@ -6721,67 +6958,79 @@
               </a:defRPr>
             </a:pPr>
             <a:r>
-              <a:t>   • Sample Size: N = 480 paired observation cycles.</a:t>
-            </a:r>
-          </a:p>
-          <a:p>
-            <a:pPr>
-              <a:spcAft>
-                <a:spcPts val="600"/>
-              </a:spcAft>
-              <a:defRPr sz="1200">
-                <a:solidFill>
-                  <a:srgbClr val="F8FAFC"/>
-                </a:solidFill>
-                <a:latin typeface="Calibri"/>
-              </a:defRPr>
-            </a:pPr>
-            <a:r>
-              <a:t>   • Baseline: 90.0s Round-Robin Fixed Timer (22.5s green).</a:t>
-            </a:r>
-          </a:p>
-          <a:p>
-            <a:pPr>
-              <a:spcAft>
-                <a:spcPts val="600"/>
-              </a:spcAft>
-              <a:defRPr sz="1200">
-                <a:solidFill>
-                  <a:srgbClr val="F8FAFC"/>
-                </a:solidFill>
-                <a:latin typeface="Calibri"/>
-              </a:defRPr>
-            </a:pPr>
-            <a:r>
-              <a:t>   • Treatment: Kinetica Dynamic Webster + Density Gap-Out.</a:t>
-            </a:r>
-          </a:p>
-          <a:p>
-            <a:pPr>
-              <a:spcAft>
-                <a:spcPts val="600"/>
-              </a:spcAft>
-              <a:defRPr sz="1200">
-                <a:solidFill>
-                  <a:srgbClr val="F8FAFC"/>
-                </a:solidFill>
-                <a:latin typeface="Calibri"/>
-              </a:defRPr>
-            </a:pPr>
-          </a:p>
-          <a:p>
-            <a:pPr>
-              <a:spcAft>
-                <a:spcPts val="600"/>
-              </a:spcAft>
-              <a:defRPr sz="1200">
-                <a:solidFill>
-                  <a:srgbClr val="F8FAFC"/>
-                </a:solidFill>
-                <a:latin typeface="Calibri"/>
-              </a:defRPr>
-            </a:pPr>
-            <a:r>
+              <a:rPr>
+                <a:latin typeface="Calibri"/>
+              </a:rPr>
+              <a:t>   - Sample Size: N = 480 paired observation cycles.</a:t>
+            </a:r>
+          </a:p>
+          <a:p>
+            <a:pPr>
+              <a:spcAft>
+                <a:spcPts val="600"/>
+              </a:spcAft>
+              <a:defRPr sz="1200">
+                <a:solidFill>
+                  <a:srgbClr val="F8FAFC"/>
+                </a:solidFill>
+                <a:latin typeface="Calibri"/>
+              </a:defRPr>
+            </a:pPr>
+            <a:r>
+              <a:rPr>
+                <a:latin typeface="Calibri"/>
+              </a:rPr>
+              <a:t>   - Baseline: 90.0s Round-Robin Fixed Timer (22.5s green).</a:t>
+            </a:r>
+          </a:p>
+          <a:p>
+            <a:pPr>
+              <a:spcAft>
+                <a:spcPts val="600"/>
+              </a:spcAft>
+              <a:defRPr sz="1200">
+                <a:solidFill>
+                  <a:srgbClr val="F8FAFC"/>
+                </a:solidFill>
+                <a:latin typeface="Calibri"/>
+              </a:defRPr>
+            </a:pPr>
+            <a:r>
+              <a:rPr>
+                <a:latin typeface="Calibri"/>
+              </a:rPr>
+              <a:t>   - Treatment: Kinetica Dynamic Webster + Density Gap-Out.</a:t>
+            </a:r>
+          </a:p>
+          <a:p>
+            <a:pPr>
+              <a:spcAft>
+                <a:spcPts val="600"/>
+              </a:spcAft>
+              <a:defRPr sz="1200">
+                <a:solidFill>
+                  <a:srgbClr val="F8FAFC"/>
+                </a:solidFill>
+                <a:latin typeface="Calibri"/>
+              </a:defRPr>
+            </a:pPr>
+          </a:p>
+          <a:p>
+            <a:pPr>
+              <a:spcAft>
+                <a:spcPts val="600"/>
+              </a:spcAft>
+              <a:defRPr sz="1200">
+                <a:solidFill>
+                  <a:srgbClr val="F8FAFC"/>
+                </a:solidFill>
+                <a:latin typeface="Calibri"/>
+              </a:defRPr>
+            </a:pPr>
+            <a:r>
+              <a:rPr>
+                <a:latin typeface="Calibri"/>
+              </a:rPr>
               <a:t>2. Normality Assessment (Shapiro-Wilk):</a:t>
             </a:r>
           </a:p>
@@ -6798,51 +7047,60 @@
               </a:defRPr>
             </a:pPr>
             <a:r>
-              <a:t>   • p_Shapiro &lt; 0.001 (Heavy right-skewed non-Gaussian).</a:t>
-            </a:r>
-          </a:p>
-          <a:p>
-            <a:pPr>
-              <a:spcAft>
-                <a:spcPts val="600"/>
-              </a:spcAft>
-              <a:defRPr sz="1200">
-                <a:solidFill>
-                  <a:srgbClr val="F8FAFC"/>
-                </a:solidFill>
-                <a:latin typeface="Calibri"/>
-              </a:defRPr>
-            </a:pPr>
-            <a:r>
-              <a:t>   • Non-parametric test strictly required.</a:t>
-            </a:r>
-          </a:p>
-          <a:p>
-            <a:pPr>
-              <a:spcAft>
-                <a:spcPts val="600"/>
-              </a:spcAft>
-              <a:defRPr sz="1200">
-                <a:solidFill>
-                  <a:srgbClr val="F8FAFC"/>
-                </a:solidFill>
-                <a:latin typeface="Calibri"/>
-              </a:defRPr>
-            </a:pPr>
-          </a:p>
-          <a:p>
-            <a:pPr>
-              <a:spcAft>
-                <a:spcPts val="600"/>
-              </a:spcAft>
-              <a:defRPr sz="1200">
-                <a:solidFill>
-                  <a:srgbClr val="F8FAFC"/>
-                </a:solidFill>
-                <a:latin typeface="Calibri"/>
-              </a:defRPr>
-            </a:pPr>
-            <a:r>
+              <a:rPr>
+                <a:latin typeface="Calibri"/>
+              </a:rPr>
+              <a:t>   - p_Shapiro &lt; 0.001 (Heavy right-skewed non-Gaussian).</a:t>
+            </a:r>
+          </a:p>
+          <a:p>
+            <a:pPr>
+              <a:spcAft>
+                <a:spcPts val="600"/>
+              </a:spcAft>
+              <a:defRPr sz="1200">
+                <a:solidFill>
+                  <a:srgbClr val="F8FAFC"/>
+                </a:solidFill>
+                <a:latin typeface="Calibri"/>
+              </a:defRPr>
+            </a:pPr>
+            <a:r>
+              <a:rPr>
+                <a:latin typeface="Calibri"/>
+              </a:rPr>
+              <a:t>   - Non-parametric test strictly required.</a:t>
+            </a:r>
+          </a:p>
+          <a:p>
+            <a:pPr>
+              <a:spcAft>
+                <a:spcPts val="600"/>
+              </a:spcAft>
+              <a:defRPr sz="1200">
+                <a:solidFill>
+                  <a:srgbClr val="F8FAFC"/>
+                </a:solidFill>
+                <a:latin typeface="Calibri"/>
+              </a:defRPr>
+            </a:pPr>
+          </a:p>
+          <a:p>
+            <a:pPr>
+              <a:spcAft>
+                <a:spcPts val="600"/>
+              </a:spcAft>
+              <a:defRPr sz="1200">
+                <a:solidFill>
+                  <a:srgbClr val="F8FAFC"/>
+                </a:solidFill>
+                <a:latin typeface="Calibri"/>
+              </a:defRPr>
+            </a:pPr>
+            <a:r>
+              <a:rPr>
+                <a:latin typeface="Calibri"/>
+              </a:rPr>
               <a:t>3. Test Metrics &amp; Effect Size:</a:t>
             </a:r>
           </a:p>
@@ -6859,83 +7117,98 @@
               </a:defRPr>
             </a:pPr>
             <a:r>
-              <a:t>   • Test Statistic: U = 8260.5 (U = 778.0 in corridor).</a:t>
-            </a:r>
-          </a:p>
-          <a:p>
-            <a:pPr>
-              <a:spcAft>
-                <a:spcPts val="600"/>
-              </a:spcAft>
-              <a:defRPr sz="1200">
-                <a:solidFill>
-                  <a:srgbClr val="F8FAFC"/>
-                </a:solidFill>
-                <a:latin typeface="Calibri"/>
-              </a:defRPr>
-            </a:pPr>
-            <a:r>
-              <a:t>   • Empirical p-Value: p = 0.0000 (p &lt; 10^-6 &lt; 0.05).</a:t>
-            </a:r>
-          </a:p>
-          <a:p>
-            <a:pPr>
-              <a:spcAft>
-                <a:spcPts val="600"/>
-              </a:spcAft>
-              <a:defRPr sz="1200">
-                <a:solidFill>
-                  <a:srgbClr val="F8FAFC"/>
-                </a:solidFill>
-                <a:latin typeface="Calibri"/>
-              </a:defRPr>
-            </a:pPr>
-            <a:r>
-              <a:t>   • Null Hypothesis (H0): REJECTED.</a:t>
-            </a:r>
-          </a:p>
-          <a:p>
-            <a:pPr>
-              <a:spcAft>
-                <a:spcPts val="600"/>
-              </a:spcAft>
-              <a:defRPr sz="1200">
-                <a:solidFill>
-                  <a:srgbClr val="F8FAFC"/>
-                </a:solidFill>
-                <a:latin typeface="Calibri"/>
-              </a:defRPr>
-            </a:pPr>
-            <a:r>
-              <a:t>   • Mean Delay Reduction: -21.64 seconds / vehicle (-38.4%).</a:t>
-            </a:r>
-          </a:p>
-          <a:p>
-            <a:pPr>
-              <a:spcAft>
-                <a:spcPts val="600"/>
-              </a:spcAft>
-              <a:defRPr sz="1200">
-                <a:solidFill>
-                  <a:srgbClr val="F8FAFC"/>
-                </a:solidFill>
-                <a:latin typeface="Calibri"/>
-              </a:defRPr>
-            </a:pPr>
-          </a:p>
-          <a:p>
-            <a:pPr>
-              <a:spcAft>
-                <a:spcPts val="600"/>
-              </a:spcAft>
-              <a:defRPr sz="1200">
-                <a:solidFill>
-                  <a:srgbClr val="F8FAFC"/>
-                </a:solidFill>
-                <a:latin typeface="Calibri"/>
-              </a:defRPr>
-            </a:pPr>
-            <a:r>
+              <a:rPr>
+                <a:latin typeface="Calibri"/>
+              </a:rPr>
+              <a:t>   - Test Statistic: U = 8260.5 (U = 778.0 in corridor).</a:t>
+            </a:r>
+          </a:p>
+          <a:p>
+            <a:pPr>
+              <a:spcAft>
+                <a:spcPts val="600"/>
+              </a:spcAft>
+              <a:defRPr sz="1200">
+                <a:solidFill>
+                  <a:srgbClr val="F8FAFC"/>
+                </a:solidFill>
+                <a:latin typeface="Calibri"/>
+              </a:defRPr>
+            </a:pPr>
+            <a:r>
+              <a:rPr>
+                <a:latin typeface="Calibri"/>
+              </a:rPr>
+              <a:t>   - Empirical p-Value: p = 0.0000 (p &lt; 10^-6 &lt; 0.05).</a:t>
+            </a:r>
+          </a:p>
+          <a:p>
+            <a:pPr>
+              <a:spcAft>
+                <a:spcPts val="600"/>
+              </a:spcAft>
+              <a:defRPr sz="1200">
+                <a:solidFill>
+                  <a:srgbClr val="F8FAFC"/>
+                </a:solidFill>
+                <a:latin typeface="Calibri"/>
+              </a:defRPr>
+            </a:pPr>
+            <a:r>
+              <a:rPr>
+                <a:latin typeface="Calibri"/>
+              </a:rPr>
+              <a:t>   - Null Hypothesis (H0): REJECTED.</a:t>
+            </a:r>
+          </a:p>
+          <a:p>
+            <a:pPr>
+              <a:spcAft>
+                <a:spcPts val="600"/>
+              </a:spcAft>
+              <a:defRPr sz="1200">
+                <a:solidFill>
+                  <a:srgbClr val="F8FAFC"/>
+                </a:solidFill>
+                <a:latin typeface="Calibri"/>
+              </a:defRPr>
+            </a:pPr>
+            <a:r>
+              <a:rPr>
+                <a:latin typeface="Calibri"/>
+              </a:rPr>
+              <a:t>   - Mean Delay Reduction: -21.64 seconds / vehicle (-38.4%).</a:t>
+            </a:r>
+          </a:p>
+          <a:p>
+            <a:pPr>
+              <a:spcAft>
+                <a:spcPts val="600"/>
+              </a:spcAft>
+              <a:defRPr sz="1200">
+                <a:solidFill>
+                  <a:srgbClr val="F8FAFC"/>
+                </a:solidFill>
+                <a:latin typeface="Calibri"/>
+              </a:defRPr>
+            </a:pPr>
+          </a:p>
+          <a:p>
+            <a:pPr>
+              <a:spcAft>
+                <a:spcPts val="600"/>
+              </a:spcAft>
+              <a:defRPr sz="1200">
+                <a:solidFill>
+                  <a:srgbClr val="F8FAFC"/>
+                </a:solidFill>
+                <a:latin typeface="Calibri"/>
+              </a:defRPr>
+            </a:pPr>
+            <a:r>
+              <a:rPr>
+                <a:latin typeface="Calibri"/>
+              </a:rPr>
               <a:t>SC4 FORMALLY VALIDATED.</a:t>
             </a:r>
           </a:p>
@@ -7059,6 +7332,9 @@
               </a:defRPr>
             </a:pPr>
             <a:r>
+              <a:rPr>
+                <a:latin typeface="Calibri"/>
+              </a:rPr>
               <a:t>PREDICTIVE ANALYTICS &amp; LIMITATIONS</a:t>
             </a:r>
           </a:p>
@@ -7095,6 +7371,9 @@
               </a:defRPr>
             </a:pPr>
             <a:r>
+              <a:rPr>
+                <a:latin typeface="Calibri"/>
+              </a:rPr>
               <a:t>Bottleneck Regression Modeling &amp; Honest Scoping Boundaries</a:t>
             </a:r>
           </a:p>
@@ -7131,6 +7410,9 @@
               </a:defRPr>
             </a:pPr>
             <a:r>
+              <a:rPr>
+                <a:latin typeface="Calibri"/>
+              </a:rPr>
               <a:t>DecisionTree feature importances, empirical flow calibration, and transparent limitation analysis</a:t>
             </a:r>
           </a:p>
@@ -7189,6 +7471,9 @@
               </a:defRPr>
             </a:pPr>
             <a:r>
+              <a:rPr>
+                <a:latin typeface="Calibri"/>
+              </a:rPr>
               <a:t>Bottleneck Modeling &amp; Scoping</a:t>
             </a:r>
           </a:p>
@@ -7205,6 +7490,9 @@
               </a:defRPr>
             </a:pPr>
             <a:r>
+              <a:rPr>
+                <a:latin typeface="Calibri"/>
+              </a:rPr>
               <a:t>1. DecisionTree Bottleneck Regressor (depth = 3):</a:t>
             </a:r>
           </a:p>
@@ -7221,67 +7509,79 @@
               </a:defRPr>
             </a:pPr>
             <a:r>
-              <a:t>   • queue_length_m: 0.7082 (70.8% Gini importance)</a:t>
-            </a:r>
-          </a:p>
-          <a:p>
-            <a:pPr>
-              <a:spcAft>
-                <a:spcPts val="600"/>
-              </a:spcAft>
-              <a:defRPr sz="1200">
-                <a:solidFill>
-                  <a:srgbClr val="F8FAFC"/>
-                </a:solidFill>
-                <a:latin typeface="Calibri"/>
-              </a:defRPr>
-            </a:pPr>
-            <a:r>
-              <a:t>   • vehicle_count: 0.2918 (29.2% Gini importance)</a:t>
-            </a:r>
-          </a:p>
-          <a:p>
-            <a:pPr>
-              <a:spcAft>
-                <a:spcPts val="600"/>
-              </a:spcAft>
-              <a:defRPr sz="1200">
-                <a:solidFill>
-                  <a:srgbClr val="F8FAFC"/>
-                </a:solidFill>
-                <a:latin typeface="Calibri"/>
-              </a:defRPr>
-            </a:pPr>
-            <a:r>
-              <a:t>   • Confirms that physical queue length (m) is the decisive physical barrier determining post-preemption recovery latency.</a:t>
-            </a:r>
-          </a:p>
-          <a:p>
-            <a:pPr>
-              <a:spcAft>
-                <a:spcPts val="600"/>
-              </a:spcAft>
-              <a:defRPr sz="1200">
-                <a:solidFill>
-                  <a:srgbClr val="F8FAFC"/>
-                </a:solidFill>
-                <a:latin typeface="Calibri"/>
-              </a:defRPr>
-            </a:pPr>
-          </a:p>
-          <a:p>
-            <a:pPr>
-              <a:spcAft>
-                <a:spcPts val="600"/>
-              </a:spcAft>
-              <a:defRPr sz="1200">
-                <a:solidFill>
-                  <a:srgbClr val="F8FAFC"/>
-                </a:solidFill>
-                <a:latin typeface="Calibri"/>
-              </a:defRPr>
-            </a:pPr>
-            <a:r>
+              <a:rPr>
+                <a:latin typeface="Calibri"/>
+              </a:rPr>
+              <a:t>   - queue_length_m: 0.7082 (70.8% Gini importance)</a:t>
+            </a:r>
+          </a:p>
+          <a:p>
+            <a:pPr>
+              <a:spcAft>
+                <a:spcPts val="600"/>
+              </a:spcAft>
+              <a:defRPr sz="1200">
+                <a:solidFill>
+                  <a:srgbClr val="F8FAFC"/>
+                </a:solidFill>
+                <a:latin typeface="Calibri"/>
+              </a:defRPr>
+            </a:pPr>
+            <a:r>
+              <a:rPr>
+                <a:latin typeface="Calibri"/>
+              </a:rPr>
+              <a:t>   - vehicle_count: 0.2918 (29.2% Gini importance)</a:t>
+            </a:r>
+          </a:p>
+          <a:p>
+            <a:pPr>
+              <a:spcAft>
+                <a:spcPts val="600"/>
+              </a:spcAft>
+              <a:defRPr sz="1200">
+                <a:solidFill>
+                  <a:srgbClr val="F8FAFC"/>
+                </a:solidFill>
+                <a:latin typeface="Calibri"/>
+              </a:defRPr>
+            </a:pPr>
+            <a:r>
+              <a:rPr>
+                <a:latin typeface="Calibri"/>
+              </a:rPr>
+              <a:t>   - Confirms that physical queue length (m) is the decisive physical barrier determining post-preemption recovery latency.</a:t>
+            </a:r>
+          </a:p>
+          <a:p>
+            <a:pPr>
+              <a:spcAft>
+                <a:spcPts val="600"/>
+              </a:spcAft>
+              <a:defRPr sz="1200">
+                <a:solidFill>
+                  <a:srgbClr val="F8FAFC"/>
+                </a:solidFill>
+                <a:latin typeface="Calibri"/>
+              </a:defRPr>
+            </a:pPr>
+          </a:p>
+          <a:p>
+            <a:pPr>
+              <a:spcAft>
+                <a:spcPts val="600"/>
+              </a:spcAft>
+              <a:defRPr sz="1200">
+                <a:solidFill>
+                  <a:srgbClr val="F8FAFC"/>
+                </a:solidFill>
+                <a:latin typeface="Calibri"/>
+              </a:defRPr>
+            </a:pPr>
+            <a:r>
+              <a:rPr>
+                <a:latin typeface="Calibri"/>
+              </a:rPr>
               <a:t>2. Empirical Saturation Flow Rate (HCM 2016):</a:t>
             </a:r>
           </a:p>
@@ -7298,35 +7598,41 @@
               </a:defRPr>
             </a:pPr>
             <a:r>
-              <a:t>   • Calibrated rate: 1800.0 veh/hr/lane (0.50 veh/s), replacing literature default (1900 veh/hr/lane).</a:t>
-            </a:r>
-          </a:p>
-          <a:p>
-            <a:pPr>
-              <a:spcAft>
-                <a:spcPts val="600"/>
-              </a:spcAft>
-              <a:defRPr sz="1200">
-                <a:solidFill>
-                  <a:srgbClr val="F8FAFC"/>
-                </a:solidFill>
-                <a:latin typeface="Calibri"/>
-              </a:defRPr>
-            </a:pPr>
-          </a:p>
-          <a:p>
-            <a:pPr>
-              <a:spcAft>
-                <a:spcPts val="600"/>
-              </a:spcAft>
-              <a:defRPr sz="1200">
-                <a:solidFill>
-                  <a:srgbClr val="F8FAFC"/>
-                </a:solidFill>
-                <a:latin typeface="Calibri"/>
-              </a:defRPr>
-            </a:pPr>
-            <a:r>
+              <a:rPr>
+                <a:latin typeface="Calibri"/>
+              </a:rPr>
+              <a:t>   - Calibrated rate: 1800.0 veh/hr/lane (0.50 veh/s), replacing literature default (1900 veh/hr/lane).</a:t>
+            </a:r>
+          </a:p>
+          <a:p>
+            <a:pPr>
+              <a:spcAft>
+                <a:spcPts val="600"/>
+              </a:spcAft>
+              <a:defRPr sz="1200">
+                <a:solidFill>
+                  <a:srgbClr val="F8FAFC"/>
+                </a:solidFill>
+                <a:latin typeface="Calibri"/>
+              </a:defRPr>
+            </a:pPr>
+          </a:p>
+          <a:p>
+            <a:pPr>
+              <a:spcAft>
+                <a:spcPts val="600"/>
+              </a:spcAft>
+              <a:defRPr sz="1200">
+                <a:solidFill>
+                  <a:srgbClr val="F8FAFC"/>
+                </a:solidFill>
+                <a:latin typeface="Calibri"/>
+              </a:defRPr>
+            </a:pPr>
+            <a:r>
+              <a:rPr>
+                <a:latin typeface="Calibri"/>
+              </a:rPr>
               <a:t>3. Honest System Scoping Boundaries:</a:t>
             </a:r>
           </a:p>
@@ -7343,23 +7649,29 @@
               </a:defRPr>
             </a:pPr>
             <a:r>
-              <a:t>   • Chi-Square Poisson rejection (p = 0.000) due to uniform 0.25s synthetic frame sampling.</a:t>
-            </a:r>
-          </a:p>
-          <a:p>
-            <a:pPr>
-              <a:spcAft>
-                <a:spcPts val="600"/>
-              </a:spcAft>
-              <a:defRPr sz="1200">
-                <a:solidFill>
-                  <a:srgbClr val="F8FAFC"/>
-                </a:solidFill>
-                <a:latin typeface="Calibri"/>
-              </a:defRPr>
-            </a:pPr>
-            <a:r>
-              <a:t>   • Homography assumes flat road surface; vibration requires periodic recalibration.</a:t>
+              <a:rPr>
+                <a:latin typeface="Calibri"/>
+              </a:rPr>
+              <a:t>   - Chi-Square Poisson rejection (p = 0.000) due to uniform 0.25s synthetic frame sampling.</a:t>
+            </a:r>
+          </a:p>
+          <a:p>
+            <a:pPr>
+              <a:spcAft>
+                <a:spcPts val="600"/>
+              </a:spcAft>
+              <a:defRPr sz="1200">
+                <a:solidFill>
+                  <a:srgbClr val="F8FAFC"/>
+                </a:solidFill>
+                <a:latin typeface="Calibri"/>
+              </a:defRPr>
+            </a:pPr>
+            <a:r>
+              <a:rPr>
+                <a:latin typeface="Calibri"/>
+              </a:rPr>
+              <a:t>   - Homography assumes flat road surface; vibration requires periodic recalibration.</a:t>
             </a:r>
           </a:p>
         </p:txBody>
@@ -7482,6 +7794,9 @@
               </a:defRPr>
             </a:pPr>
             <a:r>
+              <a:rPr>
+                <a:latin typeface="Calibri"/>
+              </a:rPr>
               <a:t>JOURNAL PAPER SUBMISSION PROOF (5 MARKS)</a:t>
             </a:r>
           </a:p>
@@ -7518,6 +7833,9 @@
               </a:defRPr>
             </a:pPr>
             <a:r>
+              <a:rPr>
+                <a:latin typeface="Calibri"/>
+              </a:rPr>
               <a:t>Official IEEE Manuscript Submission Receipt &amp; Tracking</a:t>
             </a:r>
           </a:p>
@@ -7554,6 +7872,9 @@
               </a:defRPr>
             </a:pPr>
             <a:r>
+              <a:rPr>
+                <a:latin typeface="Calibri"/>
+              </a:rPr>
               <a:t>Target Journal: IEEE Transactions on Intelligent Transportation Systems (Q1 | Impact Factor: 8.5)</a:t>
             </a:r>
           </a:p>
@@ -7612,6 +7933,9 @@
               </a:defRPr>
             </a:pPr>
             <a:r>
+              <a:rPr>
+                <a:latin typeface="Calibri"/>
+              </a:rPr>
               <a:t>Official Manuscript Confirmation Receipt</a:t>
             </a:r>
           </a:p>
@@ -7628,6 +7952,9 @@
               </a:defRPr>
             </a:pPr>
             <a:r>
+              <a:rPr>
+                <a:latin typeface="Calibri"/>
+              </a:rPr>
               <a:t>==================================================================================================</a:t>
             </a:r>
           </a:p>
@@ -7644,22 +7971,28 @@
               </a:defRPr>
             </a:pPr>
             <a:r>
-              <a:t>          IEEE TRANSACTIONS ON INTELLIGENT TRANSPORTATION SYSTEMS — SUBMISSION RECEIPT</a:t>
-            </a:r>
-          </a:p>
-          <a:p>
-            <a:pPr>
-              <a:spcAft>
-                <a:spcPts val="600"/>
-              </a:spcAft>
-              <a:defRPr sz="1200">
-                <a:solidFill>
-                  <a:srgbClr val="F8FAFC"/>
-                </a:solidFill>
-                <a:latin typeface="Calibri"/>
-              </a:defRPr>
-            </a:pPr>
-            <a:r>
+              <a:rPr>
+                <a:latin typeface="Calibri"/>
+              </a:rPr>
+              <a:t>          IEEE TRANSACTIONS ON INTELLIGENT TRANSPORTATION SYSTEMS  -  SUBMISSION RECEIPT</a:t>
+            </a:r>
+          </a:p>
+          <a:p>
+            <a:pPr>
+              <a:spcAft>
+                <a:spcPts val="600"/>
+              </a:spcAft>
+              <a:defRPr sz="1200">
+                <a:solidFill>
+                  <a:srgbClr val="F8FAFC"/>
+                </a:solidFill>
+                <a:latin typeface="Calibri"/>
+              </a:defRPr>
+            </a:pPr>
+            <a:r>
+              <a:rPr>
+                <a:latin typeface="Calibri"/>
+              </a:rPr>
               <a:t>==================================================================================================</a:t>
             </a:r>
           </a:p>
@@ -7676,6 +8009,9 @@
               </a:defRPr>
             </a:pPr>
             <a:r>
+              <a:rPr>
+                <a:latin typeface="Calibri"/>
+              </a:rPr>
               <a:t>Manuscript ID:       T-ITS-26-10-1849</a:t>
             </a:r>
           </a:p>
@@ -7692,6 +8028,9 @@
               </a:defRPr>
             </a:pPr>
             <a:r>
+              <a:rPr>
+                <a:latin typeface="Calibri"/>
+              </a:rPr>
               <a:t>Manuscript Title:    Kinetica: A Closed-Loop Cyber-Physical System for Perception-Driven Traffic Signal Control,</a:t>
             </a:r>
           </a:p>
@@ -7708,6 +8047,9 @@
               </a:defRPr>
             </a:pPr>
             <a:r>
+              <a:rPr>
+                <a:latin typeface="Calibri"/>
+              </a:rPr>
               <a:t>                     Stochastic Queue Actuation, and Priority-Aware Green Wave Preemption</a:t>
             </a:r>
           </a:p>
@@ -7724,6 +8066,9 @@
               </a:defRPr>
             </a:pPr>
             <a:r>
+              <a:rPr>
+                <a:latin typeface="Calibri"/>
+              </a:rPr>
               <a:t>Target Journal:      IEEE Transactions on Intelligent Transportation Systems (IEEE T-ITS, Q1 Tier, IF: 8.5)</a:t>
             </a:r>
           </a:p>
@@ -7740,6 +8085,9 @@
               </a:defRPr>
             </a:pPr>
             <a:r>
+              <a:rPr>
+                <a:latin typeface="Calibri"/>
+              </a:rPr>
               <a:t>Authors:             Vaibhav P.K (23BDS1148), Mithil Girish (23BDS1168), Dr. R. Krithiga (krithiga.r@vit.ac.in), Dr. Vergin Raja Sarobin M</a:t>
             </a:r>
           </a:p>
@@ -7756,6 +8104,9 @@
               </a:defRPr>
             </a:pPr>
             <a:r>
+              <a:rPr>
+                <a:latin typeface="Calibri"/>
+              </a:rPr>
               <a:t>Affiliation:         School of Computer Science and Engineering (SCOPE), Vellore Institute of Technology (VIT), Chennai</a:t>
             </a:r>
           </a:p>
@@ -7772,6 +8123,9 @@
               </a:defRPr>
             </a:pPr>
             <a:r>
+              <a:rPr>
+                <a:latin typeface="Calibri"/>
+              </a:rPr>
               <a:t>Date Submitted:      08-Oct-2026 14:32:19 UTC</a:t>
             </a:r>
           </a:p>
@@ -7788,6 +8142,9 @@
               </a:defRPr>
             </a:pPr>
             <a:r>
+              <a:rPr>
+                <a:latin typeface="Calibri"/>
+              </a:rPr>
               <a:t>Article Type:        Regular Research Article (14 Pages, Double-Column IEEE Transactions Format)</a:t>
             </a:r>
           </a:p>
@@ -7804,6 +8161,9 @@
               </a:defRPr>
             </a:pPr>
             <a:r>
+              <a:rPr>
+                <a:latin typeface="Calibri"/>
+              </a:rPr>
               <a:t>Current Status:      Under Review (Awaiting Associate Editor Assignment)</a:t>
             </a:r>
           </a:p>
@@ -7820,6 +8180,9 @@
               </a:defRPr>
             </a:pPr>
             <a:r>
+              <a:rPr>
+                <a:latin typeface="Calibri"/>
+              </a:rPr>
               <a:t>ScholarOne Portal:   https://mc.manuscriptcentral.com/tits (User Account: vaibhav.pk2023@vitstudent.ac.in)</a:t>
             </a:r>
           </a:p>
@@ -7836,6 +8199,9 @@
               </a:defRPr>
             </a:pPr>
             <a:r>
+              <a:rPr>
+                <a:latin typeface="Calibri"/>
+              </a:rPr>
               <a:t>==================================================================================================</a:t>
             </a:r>
           </a:p>
@@ -7852,6 +8218,9 @@
               </a:defRPr>
             </a:pPr>
             <a:r>
+              <a:rPr>
+                <a:latin typeface="Calibri"/>
+              </a:rPr>
               <a:t>Paper Contribution: Closed-loop CPS architecture, planar homography derivation, anti-starvation proof, and</a:t>
             </a:r>
           </a:p>
@@ -7868,6 +8237,9 @@
               </a:defRPr>
             </a:pPr>
             <a:r>
+              <a:rPr>
+                <a:latin typeface="Calibri"/>
+              </a:rPr>
               <a:t>                    empirical Mann-Whitney U test proving -38.4% delay reduction over fixed-timer baselines.</a:t>
             </a:r>
           </a:p>
@@ -7967,6 +8339,9 @@
               </a:defRPr>
             </a:pPr>
             <a:r>
+              <a:rPr>
+                <a:latin typeface="Calibri"/>
+              </a:rPr>
               <a:t>CONCLUSION &amp; REVIEW DEFENSE</a:t>
             </a:r>
           </a:p>
@@ -8003,6 +8378,9 @@
               </a:defRPr>
             </a:pPr>
             <a:r>
+              <a:rPr>
+                <a:latin typeface="Calibri"/>
+              </a:rPr>
               <a:t>Summary of Deliverables &amp; Rubrics Fulfillment</a:t>
             </a:r>
           </a:p>
@@ -8039,6 +8417,9 @@
               </a:defRPr>
             </a:pPr>
             <a:r>
+              <a:rPr>
+                <a:latin typeface="Calibri"/>
+              </a:rPr>
               <a:t>Project Kinetica satisfies all BCSE497J Project I Pre-Final Review evaluation rubrics</a:t>
             </a:r>
           </a:p>
@@ -8097,6 +8478,9 @@
               </a:defRPr>
             </a:pPr>
             <a:r>
+              <a:rPr>
+                <a:latin typeface="Calibri"/>
+              </a:rPr>
               <a:t>Rubrics Fulfillment Audit (25 Marks)</a:t>
             </a:r>
           </a:p>
@@ -8113,6 +8497,9 @@
               </a:defRPr>
             </a:pPr>
             <a:r>
+              <a:rPr>
+                <a:latin typeface="Calibri"/>
+              </a:rPr>
               <a:t>[x] Final Review Presentation (5 Marks):</a:t>
             </a:r>
           </a:p>
@@ -8129,6 +8516,9 @@
               </a:defRPr>
             </a:pPr>
             <a:r>
+              <a:rPr>
+                <a:latin typeface="Calibri"/>
+              </a:rPr>
               <a:t>    15 structured slides, cohesive visual design, comprehensive speaker notes, and rehearsed defense answers.</a:t>
             </a:r>
           </a:p>
@@ -8158,6 +8548,9 @@
               </a:defRPr>
             </a:pPr>
             <a:r>
+              <a:rPr>
+                <a:latin typeface="Calibri"/>
+              </a:rPr>
               <a:t>[x] 100% Implementation Demonstration (10 Marks):</a:t>
             </a:r>
           </a:p>
@@ -8174,6 +8567,9 @@
               </a:defRPr>
             </a:pPr>
             <a:r>
+              <a:rPr>
+                <a:latin typeface="Calibri"/>
+              </a:rPr>
               <a:t>    Live FastAPI edge gateway (8000), Next.js Control Room (3000), real-time CCTV edge detection, and 113 passing automated Pytest tests.</a:t>
             </a:r>
           </a:p>
@@ -8203,6 +8599,9 @@
               </a:defRPr>
             </a:pPr>
             <a:r>
+              <a:rPr>
+                <a:latin typeface="Calibri"/>
+              </a:rPr>
               <a:t>[x] Final Results, Metrics &amp; Interpretation (5 Marks):</a:t>
             </a:r>
           </a:p>
@@ -8219,6 +8618,9 @@
               </a:defRPr>
             </a:pPr>
             <a:r>
+              <a:rPr>
+                <a:latin typeface="Calibri"/>
+              </a:rPr>
               <a:t>    SC1, SC2, SC3, and SC4 verified; -38.4% delay reduction proven via Mann-Whitney U testing (p &lt; 0.0001).</a:t>
             </a:r>
           </a:p>
@@ -8248,6 +8650,9 @@
               </a:defRPr>
             </a:pPr>
             <a:r>
+              <a:rPr>
+                <a:latin typeface="Calibri"/>
+              </a:rPr>
               <a:t>[x] Journal Paper Submission Proof (5 Marks):</a:t>
             </a:r>
           </a:p>
@@ -8264,6 +8669,9 @@
               </a:defRPr>
             </a:pPr>
             <a:r>
+              <a:rPr>
+                <a:latin typeface="Calibri"/>
+              </a:rPr>
               <a:t>    Formal IEEE T-ITS manuscript receipt confirmed (T-ITS-26-10-1849).</a:t>
             </a:r>
           </a:p>
@@ -8322,6 +8730,9 @@
               </a:defRPr>
             </a:pPr>
             <a:r>
+              <a:rPr>
+                <a:latin typeface="Calibri"/>
+              </a:rPr>
               <a:t>Core Takeaways &amp; Open Defense</a:t>
             </a:r>
           </a:p>
@@ -8338,6 +8749,9 @@
               </a:defRPr>
             </a:pPr>
             <a:r>
+              <a:rPr>
+                <a:latin typeface="Calibri"/>
+              </a:rPr>
               <a:t>1. Cost-Effective Cyber-Physical Architecture:</a:t>
             </a:r>
           </a:p>
@@ -8354,6 +8768,9 @@
               </a:defRPr>
             </a:pPr>
             <a:r>
+              <a:rPr>
+                <a:latin typeface="Calibri"/>
+              </a:rPr>
               <a:t>   Replaces invasive pavement loops and expensive V2X transponders with non-intrusive edge camera perception.</a:t>
             </a:r>
           </a:p>
@@ -8383,6 +8800,9 @@
               </a:defRPr>
             </a:pPr>
             <a:r>
+              <a:rPr>
+                <a:latin typeface="Calibri"/>
+              </a:rPr>
               <a:t>2. Mathematical &amp; Algorithmic Discipline:</a:t>
             </a:r>
           </a:p>
@@ -8399,6 +8819,9 @@
               </a:defRPr>
             </a:pPr>
             <a:r>
+              <a:rPr>
+                <a:latin typeface="Calibri"/>
+              </a:rPr>
               <a:t>   Webster kinematic clearance bounded in [10s, 60s]; sub-microsecond max-heap with guaranteed anti-starvation aging.</a:t>
             </a:r>
           </a:p>
@@ -8428,6 +8851,9 @@
               </a:defRPr>
             </a:pPr>
             <a:r>
+              <a:rPr>
+                <a:latin typeface="Calibri"/>
+              </a:rPr>
               <a:t>3. High-Impact Societal Benefit:</a:t>
             </a:r>
           </a:p>
@@ -8444,6 +8870,9 @@
               </a:defRPr>
             </a:pPr>
             <a:r>
+              <a:rPr>
+                <a:latin typeface="Calibri"/>
+              </a:rPr>
               <a:t>   Preserves the emergency 'Golden Hour' and saves over 180,000 vehicle-hours of idling delay annually.</a:t>
             </a:r>
           </a:p>
@@ -8473,6 +8902,9 @@
               </a:defRPr>
             </a:pPr>
             <a:r>
+              <a:rPr>
+                <a:latin typeface="Calibri"/>
+              </a:rPr>
               <a:t>THANK YOU, Dr. R. KRITHIGA &amp; COMMITTEE MEMBERS!</a:t>
             </a:r>
           </a:p>
@@ -8489,6 +8921,9 @@
               </a:defRPr>
             </a:pPr>
             <a:r>
+              <a:rPr>
+                <a:latin typeface="Calibri"/>
+              </a:rPr>
               <a:t>We are now open for Viva-Voce Questions and Technical Discussion.</a:t>
             </a:r>
           </a:p>
@@ -8588,6 +9023,9 @@
               </a:defRPr>
             </a:pPr>
             <a:r>
+              <a:rPr>
+                <a:latin typeface="Calibri"/>
+              </a:rPr>
               <a:t>PROBLEM STATEMENT &amp; URBAN CONTEXT</a:t>
             </a:r>
           </a:p>
@@ -8624,6 +9062,9 @@
               </a:defRPr>
             </a:pPr>
             <a:r>
+              <a:rPr>
+                <a:latin typeface="Calibri"/>
+              </a:rPr>
               <a:t>The Metropolitan Gridlock &amp; Fixed-Timer Failure Mode</a:t>
             </a:r>
           </a:p>
@@ -8660,6 +9101,9 @@
               </a:defRPr>
             </a:pPr>
             <a:r>
+              <a:rPr>
+                <a:latin typeface="Calibri"/>
+              </a:rPr>
               <a:t>Why mid-twentieth-century signal arbitration causes urban delay and emergency fatalities</a:t>
             </a:r>
           </a:p>
@@ -8718,6 +9162,9 @@
               </a:defRPr>
             </a:pPr>
             <a:r>
+              <a:rPr>
+                <a:latin typeface="Calibri"/>
+              </a:rPr>
               <a:t>Legacy Fixed-Timer Deficiencies</a:t>
             </a:r>
           </a:p>
@@ -8734,6 +9181,9 @@
               </a:defRPr>
             </a:pPr>
             <a:r>
+              <a:rPr>
+                <a:latin typeface="Calibri"/>
+              </a:rPr>
               <a:t>1. Open-Loop Inflexibility:</a:t>
             </a:r>
           </a:p>
@@ -8750,6 +9200,9 @@
               </a:defRPr>
             </a:pPr>
             <a:r>
+              <a:rPr>
+                <a:latin typeface="Calibri"/>
+              </a:rPr>
               <a:t>   Static Webster splits allocate pre-set green times based on historical averages, maintaining green on empty approaches while congested cross-streets sit queued at red lights.</a:t>
             </a:r>
           </a:p>
@@ -8779,6 +9232,9 @@
               </a:defRPr>
             </a:pPr>
             <a:r>
+              <a:rPr>
+                <a:latin typeface="Calibri"/>
+              </a:rPr>
               <a:t>2. Asymmetric Queue Accumulation:</a:t>
             </a:r>
           </a:p>
@@ -8795,6 +9251,9 @@
               </a:defRPr>
             </a:pPr>
             <a:r>
+              <a:rPr>
+                <a:latin typeface="Calibri"/>
+              </a:rPr>
               <a:t>   Cannot dynamically adapt to stochastic traffic bursts or platoons, causing severe spillback into upstream junctions.</a:t>
             </a:r>
           </a:p>
@@ -8824,6 +9283,9 @@
               </a:defRPr>
             </a:pPr>
             <a:r>
+              <a:rPr>
+                <a:latin typeface="Calibri"/>
+              </a:rPr>
               <a:t>3. Lack of Continuous Spatial Perception:</a:t>
             </a:r>
           </a:p>
@@ -8840,6 +9302,9 @@
               </a:defRPr>
             </a:pPr>
             <a:r>
+              <a:rPr>
+                <a:latin typeface="Calibri"/>
+              </a:rPr>
               <a:t>   Legacy pavement loops detect only binary presence at a single cross-section, providing zero visibility into physical queue length (m) extending upstream.</a:t>
             </a:r>
           </a:p>
@@ -8898,6 +9363,9 @@
               </a:defRPr>
             </a:pPr>
             <a:r>
+              <a:rPr>
+                <a:latin typeface="Calibri"/>
+              </a:rPr>
               <a:t>The Emergency Preemption Crisis</a:t>
             </a:r>
           </a:p>
@@ -8914,6 +9382,9 @@
               </a:defRPr>
             </a:pPr>
             <a:r>
+              <a:rPr>
+                <a:latin typeface="Calibri"/>
+              </a:rPr>
               <a:t>1. The 'Golden Hour' Clinical Hazard:</a:t>
             </a:r>
           </a:p>
@@ -8930,35 +9401,41 @@
               </a:defRPr>
             </a:pPr>
             <a:r>
-              <a:t>   Trauma survival decreases 7–10% per minute of delay. Emergency responders lose critical time trapped at intersections.</a:t>
-            </a:r>
-          </a:p>
-          <a:p>
-            <a:pPr>
-              <a:spcAft>
-                <a:spcPts val="600"/>
-              </a:spcAft>
-              <a:defRPr sz="1200">
-                <a:solidFill>
-                  <a:srgbClr val="F8FAFC"/>
-                </a:solidFill>
-                <a:latin typeface="Calibri"/>
-              </a:defRPr>
-            </a:pPr>
-          </a:p>
-          <a:p>
-            <a:pPr>
-              <a:spcAft>
-                <a:spcPts val="600"/>
-              </a:spcAft>
-              <a:defRPr sz="1200">
-                <a:solidFill>
-                  <a:srgbClr val="F8FAFC"/>
-                </a:solidFill>
-                <a:latin typeface="Calibri"/>
-              </a:defRPr>
-            </a:pPr>
-            <a:r>
+              <a:rPr>
+                <a:latin typeface="Calibri"/>
+              </a:rPr>
+              <a:t>   Trauma survival decreases 7-10% per minute of delay. Emergency responders lose critical time trapped at intersections.</a:t>
+            </a:r>
+          </a:p>
+          <a:p>
+            <a:pPr>
+              <a:spcAft>
+                <a:spcPts val="600"/>
+              </a:spcAft>
+              <a:defRPr sz="1200">
+                <a:solidFill>
+                  <a:srgbClr val="F8FAFC"/>
+                </a:solidFill>
+                <a:latin typeface="Calibri"/>
+              </a:defRPr>
+            </a:pPr>
+          </a:p>
+          <a:p>
+            <a:pPr>
+              <a:spcAft>
+                <a:spcPts val="600"/>
+              </a:spcAft>
+              <a:defRPr sz="1200">
+                <a:solidFill>
+                  <a:srgbClr val="F8FAFC"/>
+                </a:solidFill>
+                <a:latin typeface="Calibri"/>
+              </a:defRPr>
+            </a:pPr>
+            <a:r>
+              <a:rPr>
+                <a:latin typeface="Calibri"/>
+              </a:rPr>
               <a:t>2. The 'Standing Queue Trap':</a:t>
             </a:r>
           </a:p>
@@ -8975,6 +9452,9 @@
               </a:defRPr>
             </a:pPr>
             <a:r>
+              <a:rPr>
+                <a:latin typeface="Calibri"/>
+              </a:rPr>
               <a:t>   Conventional preemption clears the signal only when the ambulance reaches the stopline, leaving it physically trapped behind standing cars waiting at red lights downstream.</a:t>
             </a:r>
           </a:p>
@@ -9004,6 +9484,9 @@
               </a:defRPr>
             </a:pPr>
             <a:r>
+              <a:rPr>
+                <a:latin typeface="Calibri"/>
+              </a:rPr>
               <a:t>3. Cross-Street Starvation &amp; Prohibitive Costs:</a:t>
             </a:r>
           </a:p>
@@ -9020,6 +9503,9 @@
               </a:defRPr>
             </a:pPr>
             <a:r>
+              <a:rPr>
+                <a:latin typeface="Calibri"/>
+              </a:rPr>
               <a:t>   Rigid FIFO overrides lock opposing cross-streets red indefinitely during repeat emergency calls. Connected V2X transponders require costly hardware retrofitting.</a:t>
             </a:r>
           </a:p>
@@ -9119,6 +9605,9 @@
               </a:defRPr>
             </a:pPr>
             <a:r>
+              <a:rPr>
+                <a:latin typeface="Calibri"/>
+              </a:rPr>
               <a:t>PROJECT OBJECTIVES &amp; SCOPE</a:t>
             </a:r>
           </a:p>
@@ -9155,7 +9644,10 @@
               </a:defRPr>
             </a:pPr>
             <a:r>
-              <a:t>Four Falsifiable Engineering Objectives (SC1 – SC4)</a:t>
+              <a:rPr>
+                <a:latin typeface="Calibri"/>
+              </a:rPr>
+              <a:t>Four Falsifiable Engineering Objectives (SC1 - SC4)</a:t>
             </a:r>
           </a:p>
         </p:txBody>
@@ -9191,6 +9683,9 @@
               </a:defRPr>
             </a:pPr>
             <a:r>
+              <a:rPr>
+                <a:latin typeface="Calibri"/>
+              </a:rPr>
               <a:t>Bridging perception, stochastic modeling, priority arbitration, and predictive analytics</a:t>
             </a:r>
           </a:p>
@@ -9249,6 +9744,9 @@
               </a:defRPr>
             </a:pPr>
             <a:r>
+              <a:rPr>
+                <a:latin typeface="Calibri"/>
+              </a:rPr>
               <a:t>SC1: Dynamic Green Allocation</a:t>
             </a:r>
           </a:p>
@@ -9265,39 +9763,48 @@
               </a:defRPr>
             </a:pPr>
             <a:r>
-              <a:t>• Green phase duration must be an increasing function of measured queue length (m).</a:t>
-            </a:r>
-          </a:p>
-          <a:p>
-            <a:pPr>
-              <a:spcAft>
-                <a:spcPts val="600"/>
-              </a:spcAft>
-              <a:defRPr sz="1200">
-                <a:solidFill>
-                  <a:srgbClr val="F8FAFC"/>
-                </a:solidFill>
-                <a:latin typeface="Calibri"/>
-              </a:defRPr>
-            </a:pPr>
-            <a:r>
-              <a:t>• Strictly bounded within physical safety limits: g in [10.0s, 60.0s].</a:t>
-            </a:r>
-          </a:p>
-          <a:p>
-            <a:pPr>
-              <a:spcAft>
-                <a:spcPts val="600"/>
-              </a:spcAft>
-              <a:defRPr sz="1200">
-                <a:solidFill>
-                  <a:srgbClr val="F8FAFC"/>
-                </a:solidFill>
-                <a:latin typeface="Calibri"/>
-              </a:defRPr>
-            </a:pPr>
-            <a:r>
-              <a:t>• Validated by: actuation/tests/test_engine.py::test_green_duration_scales_with_queue</a:t>
+              <a:rPr>
+                <a:latin typeface="Calibri"/>
+              </a:rPr>
+              <a:t>- Green phase duration must be an increasing function of measured queue length (m).</a:t>
+            </a:r>
+          </a:p>
+          <a:p>
+            <a:pPr>
+              <a:spcAft>
+                <a:spcPts val="600"/>
+              </a:spcAft>
+              <a:defRPr sz="1200">
+                <a:solidFill>
+                  <a:srgbClr val="F8FAFC"/>
+                </a:solidFill>
+                <a:latin typeface="Calibri"/>
+              </a:defRPr>
+            </a:pPr>
+            <a:r>
+              <a:rPr>
+                <a:latin typeface="Calibri"/>
+              </a:rPr>
+              <a:t>- Strictly bounded within physical safety limits: g in [10.0s, 60.0s].</a:t>
+            </a:r>
+          </a:p>
+          <a:p>
+            <a:pPr>
+              <a:spcAft>
+                <a:spcPts val="600"/>
+              </a:spcAft>
+              <a:defRPr sz="1200">
+                <a:solidFill>
+                  <a:srgbClr val="F8FAFC"/>
+                </a:solidFill>
+                <a:latin typeface="Calibri"/>
+              </a:defRPr>
+            </a:pPr>
+            <a:r>
+              <a:rPr>
+                <a:latin typeface="Calibri"/>
+              </a:rPr>
+              <a:t>- Validated by: actuation/tests/test_engine.py::test_green_duration_scales_with_queue</a:t>
             </a:r>
           </a:p>
         </p:txBody>
@@ -9355,6 +9862,9 @@
               </a:defRPr>
             </a:pPr>
             <a:r>
+              <a:rPr>
+                <a:latin typeface="Calibri"/>
+              </a:rPr>
               <a:t>SC2: Emergency Preemption Override</a:t>
             </a:r>
           </a:p>
@@ -9371,39 +9881,48 @@
               </a:defRPr>
             </a:pPr>
             <a:r>
-              <a:t>• Emergency vehicle detection must immediately elevate approach to priority heap root.</a:t>
-            </a:r>
-          </a:p>
-          <a:p>
-            <a:pPr>
-              <a:spcAft>
-                <a:spcPts val="600"/>
-              </a:spcAft>
-              <a:defRPr sz="1200">
-                <a:solidFill>
-                  <a:srgbClr val="F8FAFC"/>
-                </a:solidFill>
-                <a:latin typeface="Calibri"/>
-              </a:defRPr>
-            </a:pPr>
-            <a:r>
-              <a:t>• Supersedes FIFO and queue order in sub-microsecond latency (750 ns).</a:t>
-            </a:r>
-          </a:p>
-          <a:p>
-            <a:pPr>
-              <a:spcAft>
-                <a:spcPts val="600"/>
-              </a:spcAft>
-              <a:defRPr sz="1200">
-                <a:solidFill>
-                  <a:srgbClr val="F8FAFC"/>
-                </a:solidFill>
-                <a:latin typeface="Calibri"/>
-              </a:defRPr>
-            </a:pPr>
-            <a:r>
-              <a:t>• Validated by: preemption/tests/test_heap.py::test_priority_event_forces_root</a:t>
+              <a:rPr>
+                <a:latin typeface="Calibri"/>
+              </a:rPr>
+              <a:t>- Emergency vehicle detection must immediately elevate approach to priority heap root.</a:t>
+            </a:r>
+          </a:p>
+          <a:p>
+            <a:pPr>
+              <a:spcAft>
+                <a:spcPts val="600"/>
+              </a:spcAft>
+              <a:defRPr sz="1200">
+                <a:solidFill>
+                  <a:srgbClr val="F8FAFC"/>
+                </a:solidFill>
+                <a:latin typeface="Calibri"/>
+              </a:defRPr>
+            </a:pPr>
+            <a:r>
+              <a:rPr>
+                <a:latin typeface="Calibri"/>
+              </a:rPr>
+              <a:t>- Supersedes FIFO and queue order in sub-microsecond latency (750 ns).</a:t>
+            </a:r>
+          </a:p>
+          <a:p>
+            <a:pPr>
+              <a:spcAft>
+                <a:spcPts val="600"/>
+              </a:spcAft>
+              <a:defRPr sz="1200">
+                <a:solidFill>
+                  <a:srgbClr val="F8FAFC"/>
+                </a:solidFill>
+                <a:latin typeface="Calibri"/>
+              </a:defRPr>
+            </a:pPr>
+            <a:r>
+              <a:rPr>
+                <a:latin typeface="Calibri"/>
+              </a:rPr>
+              <a:t>- Validated by: preemption/tests/test_heap.py::test_priority_event_forces_root</a:t>
             </a:r>
           </a:p>
         </p:txBody>
@@ -9461,6 +9980,9 @@
               </a:defRPr>
             </a:pPr>
             <a:r>
+              <a:rPr>
+                <a:latin typeface="Calibri"/>
+              </a:rPr>
               <a:t>SC3: Multi-Intersection Preclear</a:t>
             </a:r>
           </a:p>
@@ -9477,39 +9999,48 @@
               </a:defRPr>
             </a:pPr>
             <a:r>
-              <a:t>• Directed graph router projects responder trajectory along corridor trunk.</a:t>
-            </a:r>
-          </a:p>
-          <a:p>
-            <a:pPr>
-              <a:spcAft>
-                <a:spcPts val="600"/>
-              </a:spcAft>
-              <a:defRPr sz="1200">
-                <a:solidFill>
-                  <a:srgbClr val="F8FAFC"/>
-                </a:solidFill>
-                <a:latin typeface="Calibri"/>
-              </a:defRPr>
-            </a:pPr>
-            <a:r>
-              <a:t>• Pre-clears green waves across multiple (&gt;1) downstream intersections ahead of arrival.</a:t>
-            </a:r>
-          </a:p>
-          <a:p>
-            <a:pPr>
-              <a:spcAft>
-                <a:spcPts val="600"/>
-              </a:spcAft>
-              <a:defRPr sz="1200">
-                <a:solidFill>
-                  <a:srgbClr val="F8FAFC"/>
-                </a:solidFill>
-                <a:latin typeface="Calibri"/>
-              </a:defRPr>
-            </a:pPr>
-            <a:r>
-              <a:t>• Validated by: preemption/tests/test_graph_router.py::test_multi_intersection_preclear</a:t>
+              <a:rPr>
+                <a:latin typeface="Calibri"/>
+              </a:rPr>
+              <a:t>- Directed graph router projects responder trajectory along corridor trunk.</a:t>
+            </a:r>
+          </a:p>
+          <a:p>
+            <a:pPr>
+              <a:spcAft>
+                <a:spcPts val="600"/>
+              </a:spcAft>
+              <a:defRPr sz="1200">
+                <a:solidFill>
+                  <a:srgbClr val="F8FAFC"/>
+                </a:solidFill>
+                <a:latin typeface="Calibri"/>
+              </a:defRPr>
+            </a:pPr>
+            <a:r>
+              <a:rPr>
+                <a:latin typeface="Calibri"/>
+              </a:rPr>
+              <a:t>- Pre-clears green waves across multiple (&gt;1) downstream intersections ahead of arrival.</a:t>
+            </a:r>
+          </a:p>
+          <a:p>
+            <a:pPr>
+              <a:spcAft>
+                <a:spcPts val="600"/>
+              </a:spcAft>
+              <a:defRPr sz="1200">
+                <a:solidFill>
+                  <a:srgbClr val="F8FAFC"/>
+                </a:solidFill>
+                <a:latin typeface="Calibri"/>
+              </a:defRPr>
+            </a:pPr>
+            <a:r>
+              <a:rPr>
+                <a:latin typeface="Calibri"/>
+              </a:rPr>
+              <a:t>- Validated by: preemption/tests/test_graph_router.py::test_multi_intersection_preclear</a:t>
             </a:r>
           </a:p>
         </p:txBody>
@@ -9567,6 +10098,9 @@
               </a:defRPr>
             </a:pPr>
             <a:r>
+              <a:rPr>
+                <a:latin typeface="Calibri"/>
+              </a:rPr>
               <a:t>SC4: Statistical Hypothesis Proof</a:t>
             </a:r>
           </a:p>
@@ -9583,39 +10117,48 @@
               </a:defRPr>
             </a:pPr>
             <a:r>
-              <a:t>• Reject null hypothesis (H0) of equal delay at alpha = 0.05 via Mann-Whitney U test.</a:t>
-            </a:r>
-          </a:p>
-          <a:p>
-            <a:pPr>
-              <a:spcAft>
-                <a:spcPts val="600"/>
-              </a:spcAft>
-              <a:defRPr sz="1200">
-                <a:solidFill>
-                  <a:srgbClr val="F8FAFC"/>
-                </a:solidFill>
-                <a:latin typeface="Calibri"/>
-              </a:defRPr>
-            </a:pPr>
-            <a:r>
-              <a:t>• 480 paired cycles prove statistically significant delay reduction (-38.4%, p &lt; 0.0001).</a:t>
-            </a:r>
-          </a:p>
-          <a:p>
-            <a:pPr>
-              <a:spcAft>
-                <a:spcPts val="600"/>
-              </a:spcAft>
-              <a:defRPr sz="1200">
-                <a:solidFill>
-                  <a:srgbClr val="F8FAFC"/>
-                </a:solidFill>
-                <a:latin typeface="Calibri"/>
-              </a:defRPr>
-            </a:pPr>
-            <a:r>
-              <a:t>• Validated by: analytics/tests/test_hypothesis_test.py::test_h0_rejected_at_alpha_05</a:t>
+              <a:rPr>
+                <a:latin typeface="Calibri"/>
+              </a:rPr>
+              <a:t>- Reject null hypothesis (H0) of equal delay at alpha = 0.05 via Mann-Whitney U test.</a:t>
+            </a:r>
+          </a:p>
+          <a:p>
+            <a:pPr>
+              <a:spcAft>
+                <a:spcPts val="600"/>
+              </a:spcAft>
+              <a:defRPr sz="1200">
+                <a:solidFill>
+                  <a:srgbClr val="F8FAFC"/>
+                </a:solidFill>
+                <a:latin typeface="Calibri"/>
+              </a:defRPr>
+            </a:pPr>
+            <a:r>
+              <a:rPr>
+                <a:latin typeface="Calibri"/>
+              </a:rPr>
+              <a:t>- 480 paired cycles prove statistically significant delay reduction (-38.4%, p &lt; 0.0001).</a:t>
+            </a:r>
+          </a:p>
+          <a:p>
+            <a:pPr>
+              <a:spcAft>
+                <a:spcPts val="600"/>
+              </a:spcAft>
+              <a:defRPr sz="1200">
+                <a:solidFill>
+                  <a:srgbClr val="F8FAFC"/>
+                </a:solidFill>
+                <a:latin typeface="Calibri"/>
+              </a:defRPr>
+            </a:pPr>
+            <a:r>
+              <a:rPr>
+                <a:latin typeface="Calibri"/>
+              </a:rPr>
+              <a:t>- Validated by: analytics/tests/test_hypothesis_test.py::test_h0_rejected_at_alpha_05</a:t>
             </a:r>
           </a:p>
         </p:txBody>
@@ -9714,6 +10257,9 @@
               </a:defRPr>
             </a:pPr>
             <a:r>
+              <a:rPr>
+                <a:latin typeface="Calibri"/>
+              </a:rPr>
               <a:t>LITERATURE REVIEW &amp; GAP ANALYSIS</a:t>
             </a:r>
           </a:p>
@@ -9750,6 +10296,9 @@
               </a:defRPr>
             </a:pPr>
             <a:r>
+              <a:rPr>
+                <a:latin typeface="Calibri"/>
+              </a:rPr>
               <a:t>State-of-the-Art Benchmarking &amp; Unresolved Gaps</a:t>
             </a:r>
           </a:p>
@@ -9786,6 +10335,9 @@
               </a:defRPr>
             </a:pPr>
             <a:r>
+              <a:rPr>
+                <a:latin typeface="Calibri"/>
+              </a:rPr>
               <a:t>Critical analysis of 18 peer-reviewed IEEE &amp; ITS publications across four pillars</a:t>
             </a:r>
           </a:p>
@@ -9844,6 +10396,9 @@
               </a:defRPr>
             </a:pPr>
             <a:r>
+              <a:rPr>
+                <a:latin typeface="Calibri"/>
+              </a:rPr>
               <a:t>Key Literature Gaps &amp; Kinetica Resolutions</a:t>
             </a:r>
           </a:p>
@@ -9860,6 +10415,9 @@
               </a:defRPr>
             </a:pPr>
             <a:r>
+              <a:rPr>
+                <a:latin typeface="Calibri"/>
+              </a:rPr>
               <a:t>1. Edge Computer Vision (Wang et al., 2023 [1]; Zhang et al., 2021 [2]):</a:t>
             </a:r>
           </a:p>
@@ -9876,67 +10434,79 @@
               </a:defRPr>
             </a:pPr>
             <a:r>
-              <a:t>   • State of the Art: High-mAP YOLO object detection, but operates purely in 2D pixel space.</a:t>
-            </a:r>
-          </a:p>
-          <a:p>
-            <a:pPr>
-              <a:spcAft>
-                <a:spcPts val="600"/>
-              </a:spcAft>
-              <a:defRPr sz="1200">
-                <a:solidFill>
-                  <a:srgbClr val="F8FAFC"/>
-                </a:solidFill>
-                <a:latin typeface="Calibri"/>
-              </a:defRPr>
-            </a:pPr>
-            <a:r>
-              <a:t>   • Unresolved Gap: Perspective foreshortening distorts distance. Pixel bounding boxes do not equal queue length in meters.</a:t>
-            </a:r>
-          </a:p>
-          <a:p>
-            <a:pPr>
-              <a:spcAft>
-                <a:spcPts val="600"/>
-              </a:spcAft>
-              <a:defRPr sz="1200">
-                <a:solidFill>
-                  <a:srgbClr val="F8FAFC"/>
-                </a:solidFill>
-                <a:latin typeface="Calibri"/>
-              </a:defRPr>
-            </a:pPr>
-            <a:r>
-              <a:t>   • Kinetica Resolution: Calibrated 3x3 planar homography (H) projects ground-contact points to metric ground plane at 55.5 FPS.</a:t>
-            </a:r>
-          </a:p>
-          <a:p>
-            <a:pPr>
-              <a:spcAft>
-                <a:spcPts val="600"/>
-              </a:spcAft>
-              <a:defRPr sz="1200">
-                <a:solidFill>
-                  <a:srgbClr val="F8FAFC"/>
-                </a:solidFill>
-                <a:latin typeface="Calibri"/>
-              </a:defRPr>
-            </a:pPr>
-          </a:p>
-          <a:p>
-            <a:pPr>
-              <a:spcAft>
-                <a:spcPts val="600"/>
-              </a:spcAft>
-              <a:defRPr sz="1200">
-                <a:solidFill>
-                  <a:srgbClr val="F8FAFC"/>
-                </a:solidFill>
-                <a:latin typeface="Calibri"/>
-              </a:defRPr>
-            </a:pPr>
-            <a:r>
+              <a:rPr>
+                <a:latin typeface="Calibri"/>
+              </a:rPr>
+              <a:t>   - State of the Art: High-mAP YOLO object detection, but operates purely in 2D pixel space.</a:t>
+            </a:r>
+          </a:p>
+          <a:p>
+            <a:pPr>
+              <a:spcAft>
+                <a:spcPts val="600"/>
+              </a:spcAft>
+              <a:defRPr sz="1200">
+                <a:solidFill>
+                  <a:srgbClr val="F8FAFC"/>
+                </a:solidFill>
+                <a:latin typeface="Calibri"/>
+              </a:defRPr>
+            </a:pPr>
+            <a:r>
+              <a:rPr>
+                <a:latin typeface="Calibri"/>
+              </a:rPr>
+              <a:t>   - Unresolved Gap: Perspective foreshortening distorts distance. Pixel bounding boxes do not equal queue length in meters.</a:t>
+            </a:r>
+          </a:p>
+          <a:p>
+            <a:pPr>
+              <a:spcAft>
+                <a:spcPts val="600"/>
+              </a:spcAft>
+              <a:defRPr sz="1200">
+                <a:solidFill>
+                  <a:srgbClr val="F8FAFC"/>
+                </a:solidFill>
+                <a:latin typeface="Calibri"/>
+              </a:defRPr>
+            </a:pPr>
+            <a:r>
+              <a:rPr>
+                <a:latin typeface="Calibri"/>
+              </a:rPr>
+              <a:t>   - Kinetica Resolution: Calibrated 3x3 planar homography (H) projects ground-contact points to metric ground plane at 55.5 FPS.</a:t>
+            </a:r>
+          </a:p>
+          <a:p>
+            <a:pPr>
+              <a:spcAft>
+                <a:spcPts val="600"/>
+              </a:spcAft>
+              <a:defRPr sz="1200">
+                <a:solidFill>
+                  <a:srgbClr val="F8FAFC"/>
+                </a:solidFill>
+                <a:latin typeface="Calibri"/>
+              </a:defRPr>
+            </a:pPr>
+          </a:p>
+          <a:p>
+            <a:pPr>
+              <a:spcAft>
+                <a:spcPts val="600"/>
+              </a:spcAft>
+              <a:defRPr sz="1200">
+                <a:solidFill>
+                  <a:srgbClr val="F8FAFC"/>
+                </a:solidFill>
+                <a:latin typeface="Calibri"/>
+              </a:defRPr>
+            </a:pPr>
+            <a:r>
+              <a:rPr>
+                <a:latin typeface="Calibri"/>
+              </a:rPr>
               <a:t>2. Stochastic Arrival Modeling (Smith et al., 2022 [5]; Genders &amp; Razavi, 2021 [7]):</a:t>
             </a:r>
           </a:p>
@@ -9953,67 +10523,79 @@
               </a:defRPr>
             </a:pPr>
             <a:r>
-              <a:t>   • State of the Art: Poisson-based green extensions or sample-inefficient Deep RL.</a:t>
-            </a:r>
-          </a:p>
-          <a:p>
-            <a:pPr>
-              <a:spcAft>
-                <a:spcPts val="600"/>
-              </a:spcAft>
-              <a:defRPr sz="1200">
-                <a:solidFill>
-                  <a:srgbClr val="F8FAFC"/>
-                </a:solidFill>
-                <a:latin typeface="Calibri"/>
-              </a:defRPr>
-            </a:pPr>
-            <a:r>
-              <a:t>   • Unresolved Gap: Most papers assume Poisson arrivals blindly without validating variance-to-mean dispersion.</a:t>
-            </a:r>
-          </a:p>
-          <a:p>
-            <a:pPr>
-              <a:spcAft>
-                <a:spcPts val="600"/>
-              </a:spcAft>
-              <a:defRPr sz="1200">
-                <a:solidFill>
-                  <a:srgbClr val="F8FAFC"/>
-                </a:solidFill>
-                <a:latin typeface="Calibri"/>
-              </a:defRPr>
-            </a:pPr>
-            <a:r>
-              <a:t>   • Kinetica Resolution: Automated Chi-Square goodness-of-fit testing; transparent reporting of non-Poissonian synthetic flow.</a:t>
-            </a:r>
-          </a:p>
-          <a:p>
-            <a:pPr>
-              <a:spcAft>
-                <a:spcPts val="600"/>
-              </a:spcAft>
-              <a:defRPr sz="1200">
-                <a:solidFill>
-                  <a:srgbClr val="F8FAFC"/>
-                </a:solidFill>
-                <a:latin typeface="Calibri"/>
-              </a:defRPr>
-            </a:pPr>
-          </a:p>
-          <a:p>
-            <a:pPr>
-              <a:spcAft>
-                <a:spcPts val="600"/>
-              </a:spcAft>
-              <a:defRPr sz="1200">
-                <a:solidFill>
-                  <a:srgbClr val="F8FAFC"/>
-                </a:solidFill>
-                <a:latin typeface="Calibri"/>
-              </a:defRPr>
-            </a:pPr>
-            <a:r>
+              <a:rPr>
+                <a:latin typeface="Calibri"/>
+              </a:rPr>
+              <a:t>   - State of the Art: Poisson-based green extensions or sample-inefficient Deep RL.</a:t>
+            </a:r>
+          </a:p>
+          <a:p>
+            <a:pPr>
+              <a:spcAft>
+                <a:spcPts val="600"/>
+              </a:spcAft>
+              <a:defRPr sz="1200">
+                <a:solidFill>
+                  <a:srgbClr val="F8FAFC"/>
+                </a:solidFill>
+                <a:latin typeface="Calibri"/>
+              </a:defRPr>
+            </a:pPr>
+            <a:r>
+              <a:rPr>
+                <a:latin typeface="Calibri"/>
+              </a:rPr>
+              <a:t>   - Unresolved Gap: Most papers assume Poisson arrivals blindly without validating variance-to-mean dispersion.</a:t>
+            </a:r>
+          </a:p>
+          <a:p>
+            <a:pPr>
+              <a:spcAft>
+                <a:spcPts val="600"/>
+              </a:spcAft>
+              <a:defRPr sz="1200">
+                <a:solidFill>
+                  <a:srgbClr val="F8FAFC"/>
+                </a:solidFill>
+                <a:latin typeface="Calibri"/>
+              </a:defRPr>
+            </a:pPr>
+            <a:r>
+              <a:rPr>
+                <a:latin typeface="Calibri"/>
+              </a:rPr>
+              <a:t>   - Kinetica Resolution: Automated Chi-Square goodness-of-fit testing; transparent reporting of non-Poissonian synthetic flow.</a:t>
+            </a:r>
+          </a:p>
+          <a:p>
+            <a:pPr>
+              <a:spcAft>
+                <a:spcPts val="600"/>
+              </a:spcAft>
+              <a:defRPr sz="1200">
+                <a:solidFill>
+                  <a:srgbClr val="F8FAFC"/>
+                </a:solidFill>
+                <a:latin typeface="Calibri"/>
+              </a:defRPr>
+            </a:pPr>
+          </a:p>
+          <a:p>
+            <a:pPr>
+              <a:spcAft>
+                <a:spcPts val="600"/>
+              </a:spcAft>
+              <a:defRPr sz="1200">
+                <a:solidFill>
+                  <a:srgbClr val="F8FAFC"/>
+                </a:solidFill>
+                <a:latin typeface="Calibri"/>
+              </a:defRPr>
+            </a:pPr>
+            <a:r>
+              <a:rPr>
+                <a:latin typeface="Calibri"/>
+              </a:rPr>
               <a:t>3. Emergency Preemption &amp; Corridor Coordination (Chen et al., 2024 [11]; Mirchandani &amp; Wang, 2021 [13]):</a:t>
             </a:r>
           </a:p>
@@ -10030,39 +10612,48 @@
               </a:defRPr>
             </a:pPr>
             <a:r>
-              <a:t>   • State of the Art: Dedicated V2X transponders; isolated single-intersection overrides.</a:t>
-            </a:r>
-          </a:p>
-          <a:p>
-            <a:pPr>
-              <a:spcAft>
-                <a:spcPts val="600"/>
-              </a:spcAft>
-              <a:defRPr sz="1200">
-                <a:solidFill>
-                  <a:srgbClr val="F8FAFC"/>
-                </a:solidFill>
-                <a:latin typeface="Calibri"/>
-              </a:defRPr>
-            </a:pPr>
-            <a:r>
-              <a:t>   • Unresolved Gap: Expensive vehicular hardware; downstream standing queue trap; cross-street starvation.</a:t>
-            </a:r>
-          </a:p>
-          <a:p>
-            <a:pPr>
-              <a:spcAft>
-                <a:spcPts val="600"/>
-              </a:spcAft>
-              <a:defRPr sz="1200">
-                <a:solidFill>
-                  <a:srgbClr val="F8FAFC"/>
-                </a:solidFill>
-                <a:latin typeface="Calibri"/>
-              </a:defRPr>
-            </a:pPr>
-            <a:r>
-              <a:t>   • Kinetica Resolution: Non-intrusive edge vision + max-heap (750 ns) with linear aging invariant + green-wave corridor router.</a:t>
+              <a:rPr>
+                <a:latin typeface="Calibri"/>
+              </a:rPr>
+              <a:t>   - State of the Art: Dedicated V2X transponders; isolated single-intersection overrides.</a:t>
+            </a:r>
+          </a:p>
+          <a:p>
+            <a:pPr>
+              <a:spcAft>
+                <a:spcPts val="600"/>
+              </a:spcAft>
+              <a:defRPr sz="1200">
+                <a:solidFill>
+                  <a:srgbClr val="F8FAFC"/>
+                </a:solidFill>
+                <a:latin typeface="Calibri"/>
+              </a:defRPr>
+            </a:pPr>
+            <a:r>
+              <a:rPr>
+                <a:latin typeface="Calibri"/>
+              </a:rPr>
+              <a:t>   - Unresolved Gap: Expensive vehicular hardware; downstream standing queue trap; cross-street starvation.</a:t>
+            </a:r>
+          </a:p>
+          <a:p>
+            <a:pPr>
+              <a:spcAft>
+                <a:spcPts val="600"/>
+              </a:spcAft>
+              <a:defRPr sz="1200">
+                <a:solidFill>
+                  <a:srgbClr val="F8FAFC"/>
+                </a:solidFill>
+                <a:latin typeface="Calibri"/>
+              </a:defRPr>
+            </a:pPr>
+            <a:r>
+              <a:rPr>
+                <a:latin typeface="Calibri"/>
+              </a:rPr>
+              <a:t>   - Kinetica Resolution: Non-intrusive edge vision + max-heap (750 ns) with linear aging invariant + green-wave corridor router.</a:t>
             </a:r>
           </a:p>
         </p:txBody>
@@ -10161,6 +10752,9 @@
               </a:defRPr>
             </a:pPr>
             <a:r>
+              <a:rPr>
+                <a:latin typeface="Calibri"/>
+              </a:rPr>
               <a:t>SYSTEM ARCHITECTURE</a:t>
             </a:r>
           </a:p>
@@ -10197,6 +10791,9 @@
               </a:defRPr>
             </a:pPr>
             <a:r>
+              <a:rPr>
+                <a:latin typeface="Calibri"/>
+              </a:rPr>
               <a:t>Closed-Loop Cyber-Physical System Topology</a:t>
             </a:r>
           </a:p>
@@ -10233,6 +10830,9 @@
               </a:defRPr>
             </a:pPr>
             <a:r>
+              <a:rPr>
+                <a:latin typeface="Calibri"/>
+              </a:rPr>
               <a:t>Continuous perception-actuation loop governed by immutable data contracts</a:t>
             </a:r>
           </a:p>
@@ -10291,6 +10891,9 @@
               </a:defRPr>
             </a:pPr>
             <a:r>
+              <a:rPr>
+                <a:latin typeface="Calibri"/>
+              </a:rPr>
               <a:t>1. Edge Perception Layer</a:t>
             </a:r>
           </a:p>
@@ -10307,54 +10910,66 @@
               </a:defRPr>
             </a:pPr>
             <a:r>
-              <a:t>• Optical Video Ingestion: 30 Hz</a:t>
-            </a:r>
-          </a:p>
-          <a:p>
-            <a:pPr>
-              <a:spcAft>
-                <a:spcPts val="600"/>
-              </a:spcAft>
-              <a:defRPr sz="1200">
-                <a:solidFill>
-                  <a:srgbClr val="F8FAFC"/>
-                </a:solidFill>
-                <a:latin typeface="Calibri"/>
-              </a:defRPr>
-            </a:pPr>
-            <a:r>
-              <a:t>• YOLOv8n ONNX Engine: 18.0 ms</a:t>
-            </a:r>
-          </a:p>
-          <a:p>
-            <a:pPr>
-              <a:spcAft>
-                <a:spcPts val="600"/>
-              </a:spcAft>
-              <a:defRPr sz="1200">
-                <a:solidFill>
-                  <a:srgbClr val="F8FAFC"/>
-                </a:solidFill>
-                <a:latin typeface="Calibri"/>
-              </a:defRPr>
-            </a:pPr>
-            <a:r>
-              <a:t>• Planar Homography H in R^(3x3):</a:t>
-            </a:r>
-          </a:p>
-          <a:p>
-            <a:pPr>
-              <a:spcAft>
-                <a:spcPts val="600"/>
-              </a:spcAft>
-              <a:defRPr sz="1200">
-                <a:solidFill>
-                  <a:srgbClr val="F8FAFC"/>
-                </a:solidFill>
-                <a:latin typeface="Calibri"/>
-              </a:defRPr>
-            </a:pPr>
-            <a:r>
+              <a:rPr>
+                <a:latin typeface="Calibri"/>
+              </a:rPr>
+              <a:t>- Optical Video Ingestion: 30 Hz</a:t>
+            </a:r>
+          </a:p>
+          <a:p>
+            <a:pPr>
+              <a:spcAft>
+                <a:spcPts val="600"/>
+              </a:spcAft>
+              <a:defRPr sz="1200">
+                <a:solidFill>
+                  <a:srgbClr val="F8FAFC"/>
+                </a:solidFill>
+                <a:latin typeface="Calibri"/>
+              </a:defRPr>
+            </a:pPr>
+            <a:r>
+              <a:rPr>
+                <a:latin typeface="Calibri"/>
+              </a:rPr>
+              <a:t>- YOLOv8n ONNX Engine: 18.0 ms</a:t>
+            </a:r>
+          </a:p>
+          <a:p>
+            <a:pPr>
+              <a:spcAft>
+                <a:spcPts val="600"/>
+              </a:spcAft>
+              <a:defRPr sz="1200">
+                <a:solidFill>
+                  <a:srgbClr val="F8FAFC"/>
+                </a:solidFill>
+                <a:latin typeface="Calibri"/>
+              </a:defRPr>
+            </a:pPr>
+            <a:r>
+              <a:rPr>
+                <a:latin typeface="Calibri"/>
+              </a:rPr>
+              <a:t>- Planar Homography H in R^(3x3):</a:t>
+            </a:r>
+          </a:p>
+          <a:p>
+            <a:pPr>
+              <a:spcAft>
+                <a:spcPts val="600"/>
+              </a:spcAft>
+              <a:defRPr sz="1200">
+                <a:solidFill>
+                  <a:srgbClr val="F8FAFC"/>
+                </a:solidFill>
+                <a:latin typeface="Calibri"/>
+              </a:defRPr>
+            </a:pPr>
+            <a:r>
+              <a:rPr>
+                <a:latin typeface="Calibri"/>
+              </a:rPr>
               <a:t>  Projects pixel footpoint (u, v) to ground coordinate (Xw, Yw).</a:t>
             </a:r>
           </a:p>
@@ -10371,22 +10986,28 @@
               </a:defRPr>
             </a:pPr>
             <a:r>
-              <a:t>• Metrics Extracted:</a:t>
-            </a:r>
-          </a:p>
-          <a:p>
-            <a:pPr>
-              <a:spcAft>
-                <a:spcPts val="600"/>
-              </a:spcAft>
-              <a:defRPr sz="1200">
-                <a:solidFill>
-                  <a:srgbClr val="F8FAFC"/>
-                </a:solidFill>
-                <a:latin typeface="Calibri"/>
-              </a:defRPr>
-            </a:pPr>
-            <a:r>
+              <a:rPr>
+                <a:latin typeface="Calibri"/>
+              </a:rPr>
+              <a:t>- Metrics Extracted:</a:t>
+            </a:r>
+          </a:p>
+          <a:p>
+            <a:pPr>
+              <a:spcAft>
+                <a:spcPts val="600"/>
+              </a:spcAft>
+              <a:defRPr sz="1200">
+                <a:solidFill>
+                  <a:srgbClr val="F8FAFC"/>
+                </a:solidFill>
+                <a:latin typeface="Calibri"/>
+              </a:defRPr>
+            </a:pPr>
+            <a:r>
+              <a:rPr>
+                <a:latin typeface="Calibri"/>
+              </a:rPr>
               <a:t>  Queue length q (m)</a:t>
             </a:r>
           </a:p>
@@ -10403,6 +11024,9 @@
               </a:defRPr>
             </a:pPr>
             <a:r>
+              <a:rPr>
+                <a:latin typeface="Calibri"/>
+              </a:rPr>
               <a:t>  Spatial density rho (veh/m)</a:t>
             </a:r>
           </a:p>
@@ -10419,22 +11043,28 @@
               </a:defRPr>
             </a:pPr>
             <a:r>
-              <a:t>• HSV Emergency Classifier:</a:t>
-            </a:r>
-          </a:p>
-          <a:p>
-            <a:pPr>
-              <a:spcAft>
-                <a:spcPts val="600"/>
-              </a:spcAft>
-              <a:defRPr sz="1200">
-                <a:solidFill>
-                  <a:srgbClr val="F8FAFC"/>
-                </a:solidFill>
-                <a:latin typeface="Calibri"/>
-              </a:defRPr>
-            </a:pPr>
-            <a:r>
+              <a:rPr>
+                <a:latin typeface="Calibri"/>
+              </a:rPr>
+              <a:t>- HSV Emergency Classifier:</a:t>
+            </a:r>
+          </a:p>
+          <a:p>
+            <a:pPr>
+              <a:spcAft>
+                <a:spcPts val="600"/>
+              </a:spcAft>
+              <a:defRPr sz="1200">
+                <a:solidFill>
+                  <a:srgbClr val="F8FAFC"/>
+                </a:solidFill>
+                <a:latin typeface="Calibri"/>
+              </a:defRPr>
+            </a:pPr>
+            <a:r>
+              <a:rPr>
+                <a:latin typeface="Calibri"/>
+              </a:rPr>
               <a:t>  100% civilian specificity</a:t>
             </a:r>
           </a:p>
@@ -10493,6 +11123,9 @@
               </a:defRPr>
             </a:pPr>
             <a:r>
+              <a:rPr>
+                <a:latin typeface="Calibri"/>
+              </a:rPr>
               <a:t>2. Cyber Decision Engines</a:t>
             </a:r>
           </a:p>
@@ -10509,22 +11142,28 @@
               </a:defRPr>
             </a:pPr>
             <a:r>
-              <a:t>• Immutable Schemas:</a:t>
-            </a:r>
-          </a:p>
-          <a:p>
-            <a:pPr>
-              <a:spcAft>
-                <a:spcPts val="600"/>
-              </a:spcAft>
-              <a:defRPr sz="1200">
-                <a:solidFill>
-                  <a:srgbClr val="F8FAFC"/>
-                </a:solidFill>
-                <a:latin typeface="Calibri"/>
-              </a:defRPr>
-            </a:pPr>
-            <a:r>
+              <a:rPr>
+                <a:latin typeface="Calibri"/>
+              </a:rPr>
+              <a:t>- Immutable Schemas:</a:t>
+            </a:r>
+          </a:p>
+          <a:p>
+            <a:pPr>
+              <a:spcAft>
+                <a:spcPts val="600"/>
+              </a:spcAft>
+              <a:defRPr sz="1200">
+                <a:solidFill>
+                  <a:srgbClr val="F8FAFC"/>
+                </a:solidFill>
+                <a:latin typeface="Calibri"/>
+              </a:defRPr>
+            </a:pPr>
+            <a:r>
+              <a:rPr>
+                <a:latin typeface="Calibri"/>
+              </a:rPr>
               <a:t>  LaneObservation &amp; PriorityEvent</a:t>
             </a:r>
           </a:p>
@@ -10541,22 +11180,28 @@
               </a:defRPr>
             </a:pPr>
             <a:r>
-              <a:t>• Actuation Engine (actuation/):</a:t>
-            </a:r>
-          </a:p>
-          <a:p>
-            <a:pPr>
-              <a:spcAft>
-                <a:spcPts val="600"/>
-              </a:spcAft>
-              <a:defRPr sz="1200">
-                <a:solidFill>
-                  <a:srgbClr val="F8FAFC"/>
-                </a:solidFill>
-                <a:latin typeface="Calibri"/>
-              </a:defRPr>
-            </a:pPr>
-            <a:r>
+              <a:rPr>
+                <a:latin typeface="Calibri"/>
+              </a:rPr>
+              <a:t>- Actuation Engine (actuation/):</a:t>
+            </a:r>
+          </a:p>
+          <a:p>
+            <a:pPr>
+              <a:spcAft>
+                <a:spcPts val="600"/>
+              </a:spcAft>
+              <a:defRPr sz="1200">
+                <a:solidFill>
+                  <a:srgbClr val="F8FAFC"/>
+                </a:solidFill>
+                <a:latin typeface="Calibri"/>
+              </a:defRPr>
+            </a:pPr>
+            <a:r>
+              <a:rPr>
+                <a:latin typeface="Calibri"/>
+              </a:rPr>
               <a:t>  Rolling EWMA arrival rate lambda</a:t>
             </a:r>
           </a:p>
@@ -10573,6 +11218,9 @@
               </a:defRPr>
             </a:pPr>
             <a:r>
+              <a:rPr>
+                <a:latin typeface="Calibri"/>
+              </a:rPr>
               <a:t>  Webster kinematic clearance [10s, 60s]</a:t>
             </a:r>
           </a:p>
@@ -10589,6 +11237,9 @@
               </a:defRPr>
             </a:pPr>
             <a:r>
+              <a:rPr>
+                <a:latin typeface="Calibri"/>
+              </a:rPr>
               <a:t>  Dynamic density gap-out truncation</a:t>
             </a:r>
           </a:p>
@@ -10605,22 +11256,28 @@
               </a:defRPr>
             </a:pPr>
             <a:r>
-              <a:t>• Preemption Engine (preemption/):</a:t>
-            </a:r>
-          </a:p>
-          <a:p>
-            <a:pPr>
-              <a:spcAft>
-                <a:spcPts val="600"/>
-              </a:spcAft>
-              <a:defRPr sz="1200">
-                <a:solidFill>
-                  <a:srgbClr val="F8FAFC"/>
-                </a:solidFill>
-                <a:latin typeface="Calibri"/>
-              </a:defRPr>
-            </a:pPr>
-            <a:r>
+              <a:rPr>
+                <a:latin typeface="Calibri"/>
+              </a:rPr>
+              <a:t>- Preemption Engine (preemption/):</a:t>
+            </a:r>
+          </a:p>
+          <a:p>
+            <a:pPr>
+              <a:spcAft>
+                <a:spcPts val="600"/>
+              </a:spcAft>
+              <a:defRPr sz="1200">
+                <a:solidFill>
+                  <a:srgbClr val="F8FAFC"/>
+                </a:solidFill>
+                <a:latin typeface="Calibri"/>
+              </a:defRPr>
+            </a:pPr>
+            <a:r>
+              <a:rPr>
+                <a:latin typeface="Calibri"/>
+              </a:rPr>
               <a:t>  LanePriorityHeap (750 ns latency)</a:t>
             </a:r>
           </a:p>
@@ -10637,6 +11294,9 @@
               </a:defRPr>
             </a:pPr>
             <a:r>
+              <a:rPr>
+                <a:latin typeface="Calibri"/>
+              </a:rPr>
               <a:t>  Linear aging anti-starvation (+1.0*w)</a:t>
             </a:r>
           </a:p>
@@ -10653,6 +11313,9 @@
               </a:defRPr>
             </a:pPr>
             <a:r>
+              <a:rPr>
+                <a:latin typeface="Calibri"/>
+              </a:rPr>
               <a:t>  NetworkX directed corridor routing</a:t>
             </a:r>
           </a:p>
@@ -10711,6 +11374,9 @@
               </a:defRPr>
             </a:pPr>
             <a:r>
+              <a:rPr>
+                <a:latin typeface="Calibri"/>
+              </a:rPr>
               <a:t>3. Physical Control &amp; Loop</a:t>
             </a:r>
           </a:p>
@@ -10727,22 +11393,28 @@
               </a:defRPr>
             </a:pPr>
             <a:r>
-              <a:t>• PhaseDecision Contracts:</a:t>
-            </a:r>
-          </a:p>
-          <a:p>
-            <a:pPr>
-              <a:spcAft>
-                <a:spcPts val="600"/>
-              </a:spcAft>
-              <a:defRPr sz="1200">
-                <a:solidFill>
-                  <a:srgbClr val="F8FAFC"/>
-                </a:solidFill>
-                <a:latin typeface="Calibri"/>
-              </a:defRPr>
-            </a:pPr>
-            <a:r>
+              <a:rPr>
+                <a:latin typeface="Calibri"/>
+              </a:rPr>
+              <a:t>- PhaseDecision Contracts:</a:t>
+            </a:r>
+          </a:p>
+          <a:p>
+            <a:pPr>
+              <a:spcAft>
+                <a:spcPts val="600"/>
+              </a:spcAft>
+              <a:defRPr sz="1200">
+                <a:solidFill>
+                  <a:srgbClr val="F8FAFC"/>
+                </a:solidFill>
+                <a:latin typeface="Calibri"/>
+              </a:defRPr>
+            </a:pPr>
+            <a:r>
+              <a:rPr>
+                <a:latin typeface="Calibri"/>
+              </a:rPr>
               <a:t>  Dispatches SCHEDULED, EXTENDED, or PREEMPTED signal indications.</a:t>
             </a:r>
           </a:p>
@@ -10759,22 +11431,28 @@
               </a:defRPr>
             </a:pPr>
             <a:r>
-              <a:t>• Physical Signal Actuation:</a:t>
-            </a:r>
-          </a:p>
-          <a:p>
-            <a:pPr>
-              <a:spcAft>
-                <a:spcPts val="600"/>
-              </a:spcAft>
-              <a:defRPr sz="1200">
-                <a:solidFill>
-                  <a:srgbClr val="F8FAFC"/>
-                </a:solidFill>
-                <a:latin typeface="Calibri"/>
-              </a:defRPr>
-            </a:pPr>
-            <a:r>
+              <a:rPr>
+                <a:latin typeface="Calibri"/>
+              </a:rPr>
+              <a:t>- Physical Signal Actuation:</a:t>
+            </a:r>
+          </a:p>
+          <a:p>
+            <a:pPr>
+              <a:spcAft>
+                <a:spcPts val="600"/>
+              </a:spcAft>
+              <a:defRPr sz="1200">
+                <a:solidFill>
+                  <a:srgbClr val="F8FAFC"/>
+                </a:solidFill>
+                <a:latin typeface="Calibri"/>
+              </a:defRPr>
+            </a:pPr>
+            <a:r>
+              <a:rPr>
+                <a:latin typeface="Calibri"/>
+              </a:rPr>
               <a:t>  Modifies intersection signal heads and executes clearance phases.</a:t>
             </a:r>
           </a:p>
@@ -10791,22 +11469,28 @@
               </a:defRPr>
             </a:pPr>
             <a:r>
-              <a:t>• Closing the Loop:</a:t>
-            </a:r>
-          </a:p>
-          <a:p>
-            <a:pPr>
-              <a:spcAft>
-                <a:spcPts val="600"/>
-              </a:spcAft>
-              <a:defRPr sz="1200">
-                <a:solidFill>
-                  <a:srgbClr val="F8FAFC"/>
-                </a:solidFill>
-                <a:latin typeface="Calibri"/>
-              </a:defRPr>
-            </a:pPr>
-            <a:r>
+              <a:rPr>
+                <a:latin typeface="Calibri"/>
+              </a:rPr>
+              <a:t>- Closing the Loop:</a:t>
+            </a:r>
+          </a:p>
+          <a:p>
+            <a:pPr>
+              <a:spcAft>
+                <a:spcPts val="600"/>
+              </a:spcAft>
+              <a:defRPr sz="1200">
+                <a:solidFill>
+                  <a:srgbClr val="F8FAFC"/>
+                </a:solidFill>
+                <a:latin typeface="Calibri"/>
+              </a:defRPr>
+            </a:pPr>
+            <a:r>
+              <a:rPr>
+                <a:latin typeface="Calibri"/>
+              </a:rPr>
               <a:t>  Discharged traffic updates the physical queue, immediately perceived in next frame cycle.</a:t>
             </a:r>
           </a:p>
@@ -10823,7 +11507,10 @@
               </a:defRPr>
             </a:pPr>
             <a:r>
-              <a:t>• 30 Hz Next.js CAD Dashboard</a:t>
+              <a:rPr>
+                <a:latin typeface="Calibri"/>
+              </a:rPr>
+              <a:t>- 30 Hz Next.js CAD Dashboard</a:t>
             </a:r>
           </a:p>
         </p:txBody>
@@ -10922,6 +11609,9 @@
               </a:defRPr>
             </a:pPr>
             <a:r>
+              <a:rPr>
+                <a:latin typeface="Calibri"/>
+              </a:rPr>
               <a:t>MODULE 1: EDGE COMPUTER VISION</a:t>
             </a:r>
           </a:p>
@@ -10958,6 +11648,9 @@
               </a:defRPr>
             </a:pPr>
             <a:r>
+              <a:rPr>
+                <a:latin typeface="Calibri"/>
+              </a:rPr>
               <a:t>Spatial Inverse Perspective Mapping &amp; Emergency Classification</a:t>
             </a:r>
           </a:p>
@@ -10994,6 +11687,9 @@
               </a:defRPr>
             </a:pPr>
             <a:r>
+              <a:rPr>
+                <a:latin typeface="Calibri"/>
+              </a:rPr>
               <a:t>Transforming oblique camera feeds into calibrated Euclidean roadway coordinates</a:t>
             </a:r>
           </a:p>
@@ -11052,6 +11748,9 @@
               </a:defRPr>
             </a:pPr>
             <a:r>
+              <a:rPr>
+                <a:latin typeface="Calibri"/>
+              </a:rPr>
               <a:t>Inverse Perspective Mapping (IPM)</a:t>
             </a:r>
           </a:p>
@@ -11068,6 +11767,9 @@
               </a:defRPr>
             </a:pPr>
             <a:r>
+              <a:rPr>
+                <a:latin typeface="Calibri"/>
+              </a:rPr>
               <a:t>1. Resolving the Perspective Distortion Gap:</a:t>
             </a:r>
           </a:p>
@@ -11084,6 +11786,9 @@
               </a:defRPr>
             </a:pPr>
             <a:r>
+              <a:rPr>
+                <a:latin typeface="Calibri"/>
+              </a:rPr>
               <a:t>   Standard 2D bounding boxes do not reflect metric distance due to camera foreshortening.</a:t>
             </a:r>
           </a:p>
@@ -11113,6 +11818,9 @@
               </a:defRPr>
             </a:pPr>
             <a:r>
+              <a:rPr>
+                <a:latin typeface="Calibri"/>
+              </a:rPr>
               <a:t>2. Homography Mathematical Projection:</a:t>
             </a:r>
           </a:p>
@@ -11129,6 +11837,9 @@
               </a:defRPr>
             </a:pPr>
             <a:r>
+              <a:rPr>
+                <a:latin typeface="Calibri"/>
+              </a:rPr>
               <a:t>   [Xw, Yw, 1]^T ~ H * [u, v, 1]^T</a:t>
             </a:r>
           </a:p>
@@ -11145,6 +11856,9 @@
               </a:defRPr>
             </a:pPr>
             <a:r>
+              <a:rPr>
+                <a:latin typeface="Calibri"/>
+              </a:rPr>
               <a:t>   Bottom-center of bounding box: u = (x1+x2)/2, v = y2</a:t>
             </a:r>
           </a:p>
@@ -11161,6 +11875,9 @@
               </a:defRPr>
             </a:pPr>
             <a:r>
+              <a:rPr>
+                <a:latin typeface="Calibri"/>
+              </a:rPr>
               <a:t>   Ground coordinate: Xw = (h11*u + h12*v + h13) / (h31*u + h32*v + h33)</a:t>
             </a:r>
           </a:p>
@@ -11190,6 +11907,9 @@
               </a:defRPr>
             </a:pPr>
             <a:r>
+              <a:rPr>
+                <a:latin typeface="Calibri"/>
+              </a:rPr>
               <a:t>3. Physical Metric Calculations:</a:t>
             </a:r>
           </a:p>
@@ -11206,6 +11926,9 @@
               </a:defRPr>
             </a:pPr>
             <a:r>
+              <a:rPr>
+                <a:latin typeface="Calibri"/>
+              </a:rPr>
               <a:t>   Queue length q = max_i sqrt((Xw - Xstop)^2 + (Yw - Ystop)^2) [meters]</a:t>
             </a:r>
           </a:p>
@@ -11222,6 +11945,9 @@
               </a:defRPr>
             </a:pPr>
             <a:r>
+              <a:rPr>
+                <a:latin typeface="Calibri"/>
+              </a:rPr>
               <a:t>   Spatial density rho = N_vehicles / L_approach [veh/meter]</a:t>
             </a:r>
           </a:p>
@@ -11251,6 +11977,9 @@
               </a:defRPr>
             </a:pPr>
             <a:r>
+              <a:rPr>
+                <a:latin typeface="Calibri"/>
+              </a:rPr>
               <a:t>4. Real-Time CPU Throughput:</a:t>
             </a:r>
           </a:p>
@@ -11267,6 +11996,9 @@
               </a:defRPr>
             </a:pPr>
             <a:r>
+              <a:rPr>
+                <a:latin typeface="Calibri"/>
+              </a:rPr>
               <a:t>   18.0 ms neural inference (55.5 FPS); 21.9 ms total loop (45.6 FPS).</a:t>
             </a:r>
           </a:p>
@@ -11325,6 +12057,9 @@
               </a:defRPr>
             </a:pPr>
             <a:r>
+              <a:rPr>
+                <a:latin typeface="Calibri"/>
+              </a:rPr>
               <a:t>Emergency Livery Classification</a:t>
             </a:r>
           </a:p>
@@ -11341,6 +12076,9 @@
               </a:defRPr>
             </a:pPr>
             <a:r>
+              <a:rPr>
+                <a:latin typeface="Calibri"/>
+              </a:rPr>
               <a:t>1. Rooftop 20% Region of Interest (ROI):</a:t>
             </a:r>
           </a:p>
@@ -11357,6 +12095,9 @@
               </a:defRPr>
             </a:pPr>
             <a:r>
+              <a:rPr>
+                <a:latin typeface="Calibri"/>
+              </a:rPr>
               <a:t>   Isolates rooftop beacon lightbars from main chassis.</a:t>
             </a:r>
           </a:p>
@@ -11386,6 +12127,9 @@
               </a:defRPr>
             </a:pPr>
             <a:r>
+              <a:rPr>
+                <a:latin typeface="Calibri"/>
+              </a:rPr>
               <a:t>2. Dual-Zone HSV Color-Space Segmentation:</a:t>
             </a:r>
           </a:p>
@@ -11402,83 +12146,98 @@
               </a:defRPr>
             </a:pPr>
             <a:r>
-              <a:t>   • White Medical Chassis: S &lt;= 35, V &gt;= 180</a:t>
-            </a:r>
-          </a:p>
-          <a:p>
-            <a:pPr>
-              <a:spcAft>
-                <a:spcPts val="600"/>
-              </a:spcAft>
-              <a:defRPr sz="1200">
-                <a:solidFill>
-                  <a:srgbClr val="F8FAFC"/>
-                </a:solidFill>
-                <a:latin typeface="Calibri"/>
-              </a:defRPr>
-            </a:pPr>
-            <a:r>
-              <a:t>   • Red/Green Caduceus Livery: H in [0, 10] U [170, 180]</a:t>
-            </a:r>
-          </a:p>
-          <a:p>
-            <a:pPr>
-              <a:spcAft>
-                <a:spcPts val="600"/>
-              </a:spcAft>
-              <a:defRPr sz="1200">
-                <a:solidFill>
-                  <a:srgbClr val="F8FAFC"/>
-                </a:solidFill>
-                <a:latin typeface="Calibri"/>
-              </a:defRPr>
-            </a:pPr>
-            <a:r>
-              <a:t>   • Police Blue Beacon: H in [100, 130], S &gt;= 120, V &gt;= 100</a:t>
-            </a:r>
-          </a:p>
-          <a:p>
-            <a:pPr>
-              <a:spcAft>
-                <a:spcPts val="600"/>
-              </a:spcAft>
-              <a:defRPr sz="1200">
-                <a:solidFill>
-                  <a:srgbClr val="F8FAFC"/>
-                </a:solidFill>
-                <a:latin typeface="Calibri"/>
-              </a:defRPr>
-            </a:pPr>
-            <a:r>
-              <a:t>   • School Van Amber: H in [20, 35], S &gt;= 100, V &gt;= 140</a:t>
-            </a:r>
-          </a:p>
-          <a:p>
-            <a:pPr>
-              <a:spcAft>
-                <a:spcPts val="600"/>
-              </a:spcAft>
-              <a:defRPr sz="1200">
-                <a:solidFill>
-                  <a:srgbClr val="F8FAFC"/>
-                </a:solidFill>
-                <a:latin typeface="Calibri"/>
-              </a:defRPr>
-            </a:pPr>
-          </a:p>
-          <a:p>
-            <a:pPr>
-              <a:spcAft>
-                <a:spcPts val="600"/>
-              </a:spcAft>
-              <a:defRPr sz="1200">
-                <a:solidFill>
-                  <a:srgbClr val="F8FAFC"/>
-                </a:solidFill>
-                <a:latin typeface="Calibri"/>
-              </a:defRPr>
-            </a:pPr>
-            <a:r>
+              <a:rPr>
+                <a:latin typeface="Calibri"/>
+              </a:rPr>
+              <a:t>   - White Medical Chassis: S &lt;= 35, V &gt;= 180</a:t>
+            </a:r>
+          </a:p>
+          <a:p>
+            <a:pPr>
+              <a:spcAft>
+                <a:spcPts val="600"/>
+              </a:spcAft>
+              <a:defRPr sz="1200">
+                <a:solidFill>
+                  <a:srgbClr val="F8FAFC"/>
+                </a:solidFill>
+                <a:latin typeface="Calibri"/>
+              </a:defRPr>
+            </a:pPr>
+            <a:r>
+              <a:rPr>
+                <a:latin typeface="Calibri"/>
+              </a:rPr>
+              <a:t>   - Red/Green Caduceus Livery: H in [0, 10] U [170, 180]</a:t>
+            </a:r>
+          </a:p>
+          <a:p>
+            <a:pPr>
+              <a:spcAft>
+                <a:spcPts val="600"/>
+              </a:spcAft>
+              <a:defRPr sz="1200">
+                <a:solidFill>
+                  <a:srgbClr val="F8FAFC"/>
+                </a:solidFill>
+                <a:latin typeface="Calibri"/>
+              </a:defRPr>
+            </a:pPr>
+            <a:r>
+              <a:rPr>
+                <a:latin typeface="Calibri"/>
+              </a:rPr>
+              <a:t>   - Police Blue Beacon: H in [100, 130], S &gt;= 120, V &gt;= 100</a:t>
+            </a:r>
+          </a:p>
+          <a:p>
+            <a:pPr>
+              <a:spcAft>
+                <a:spcPts val="600"/>
+              </a:spcAft>
+              <a:defRPr sz="1200">
+                <a:solidFill>
+                  <a:srgbClr val="F8FAFC"/>
+                </a:solidFill>
+                <a:latin typeface="Calibri"/>
+              </a:defRPr>
+            </a:pPr>
+            <a:r>
+              <a:rPr>
+                <a:latin typeface="Calibri"/>
+              </a:rPr>
+              <a:t>   - School Van Amber: H in [20, 35], S &gt;= 100, V &gt;= 140</a:t>
+            </a:r>
+          </a:p>
+          <a:p>
+            <a:pPr>
+              <a:spcAft>
+                <a:spcPts val="600"/>
+              </a:spcAft>
+              <a:defRPr sz="1200">
+                <a:solidFill>
+                  <a:srgbClr val="F8FAFC"/>
+                </a:solidFill>
+                <a:latin typeface="Calibri"/>
+              </a:defRPr>
+            </a:pPr>
+          </a:p>
+          <a:p>
+            <a:pPr>
+              <a:spcAft>
+                <a:spcPts val="600"/>
+              </a:spcAft>
+              <a:defRPr sz="1200">
+                <a:solidFill>
+                  <a:srgbClr val="F8FAFC"/>
+                </a:solidFill>
+                <a:latin typeface="Calibri"/>
+              </a:defRPr>
+            </a:pPr>
+            <a:r>
+              <a:rPr>
+                <a:latin typeface="Calibri"/>
+              </a:rPr>
               <a:t>3. Strict Civilian False-Positive Guard:</a:t>
             </a:r>
           </a:p>
@@ -11495,6 +12254,9 @@
               </a:defRPr>
             </a:pPr>
             <a:r>
+              <a:rPr>
+                <a:latin typeface="Calibri"/>
+              </a:rPr>
               <a:t>   Rejects brightly painted standard civilian cars lacking beacon ratios.</a:t>
             </a:r>
           </a:p>
@@ -11511,23 +12273,29 @@
               </a:defRPr>
             </a:pPr>
             <a:r>
-              <a:t>   • 100.0% Civilian Specificity (0 false positives)</a:t>
-            </a:r>
-          </a:p>
-          <a:p>
-            <a:pPr>
-              <a:spcAft>
-                <a:spcPts val="600"/>
-              </a:spcAft>
-              <a:defRPr sz="1200">
-                <a:solidFill>
-                  <a:srgbClr val="F8FAFC"/>
-                </a:solidFill>
-                <a:latin typeface="Calibri"/>
-              </a:defRPr>
-            </a:pPr>
-            <a:r>
-              <a:t>   • 97.0% Emergency Recall (97/100 detected)</a:t>
+              <a:rPr>
+                <a:latin typeface="Calibri"/>
+              </a:rPr>
+              <a:t>   - 100.0% Civilian Specificity (0 false positives)</a:t>
+            </a:r>
+          </a:p>
+          <a:p>
+            <a:pPr>
+              <a:spcAft>
+                <a:spcPts val="600"/>
+              </a:spcAft>
+              <a:defRPr sz="1200">
+                <a:solidFill>
+                  <a:srgbClr val="F8FAFC"/>
+                </a:solidFill>
+                <a:latin typeface="Calibri"/>
+              </a:defRPr>
+            </a:pPr>
+            <a:r>
+              <a:rPr>
+                <a:latin typeface="Calibri"/>
+              </a:rPr>
+              <a:t>   - 97.0% Emergency Recall (97/100 detected)</a:t>
             </a:r>
           </a:p>
         </p:txBody>
@@ -11626,6 +12394,9 @@
               </a:defRPr>
             </a:pPr>
             <a:r>
+              <a:rPr>
+                <a:latin typeface="Calibri"/>
+              </a:rPr>
               <a:t>MODULE 2: STOCHASTIC ACTUATION</a:t>
             </a:r>
           </a:p>
@@ -11662,6 +12433,9 @@
               </a:defRPr>
             </a:pPr>
             <a:r>
+              <a:rPr>
+                <a:latin typeface="Calibri"/>
+              </a:rPr>
               <a:t>Demand-Responsive Green Allocation &amp; Arrival Modeling</a:t>
             </a:r>
           </a:p>
@@ -11698,6 +12472,9 @@
               </a:defRPr>
             </a:pPr>
             <a:r>
+              <a:rPr>
+                <a:latin typeface="Calibri"/>
+              </a:rPr>
               <a:t>Kinematic queue clearance, density gap-out truncation, and Chi-Square goodness-of-fit</a:t>
             </a:r>
           </a:p>
@@ -11756,6 +12533,9 @@
               </a:defRPr>
             </a:pPr>
             <a:r>
+              <a:rPr>
+                <a:latin typeface="Calibri"/>
+              </a:rPr>
               <a:t>Webster Kinematic Actuation (SC1)</a:t>
             </a:r>
           </a:p>
@@ -11772,6 +12552,9 @@
               </a:defRPr>
             </a:pPr>
             <a:r>
+              <a:rPr>
+                <a:latin typeface="Calibri"/>
+              </a:rPr>
               <a:t>1. Dynamic Green Phase Allocation:</a:t>
             </a:r>
           </a:p>
@@ -11788,6 +12571,9 @@
               </a:defRPr>
             </a:pPr>
             <a:r>
+              <a:rPr>
+                <a:latin typeface="Calibri"/>
+              </a:rPr>
               <a:t>   g_target = t_lost + (q / v_discharge)</a:t>
             </a:r>
           </a:p>
@@ -11804,6 +12590,9 @@
               </a:defRPr>
             </a:pPr>
             <a:r>
+              <a:rPr>
+                <a:latin typeface="Calibri"/>
+              </a:rPr>
               <a:t>   where t_lost = 2.0s and v_discharge = (s_flow/3600)*L_veh.</a:t>
             </a:r>
           </a:p>
@@ -11833,6 +12622,9 @@
               </a:defRPr>
             </a:pPr>
             <a:r>
+              <a:rPr>
+                <a:latin typeface="Calibri"/>
+              </a:rPr>
               <a:t>2. Strict Operational Safety Bounds:</a:t>
             </a:r>
           </a:p>
@@ -11849,6 +12641,9 @@
               </a:defRPr>
             </a:pPr>
             <a:r>
+              <a:rPr>
+                <a:latin typeface="Calibri"/>
+              </a:rPr>
               <a:t>   g = min(60.0s, max(10.0s, g_target))</a:t>
             </a:r>
           </a:p>
@@ -11865,70 +12660,85 @@
               </a:defRPr>
             </a:pPr>
             <a:r>
-              <a:t>   • q = 0.0m -&gt; g = 10.0s (clamped to g_min)</a:t>
-            </a:r>
-          </a:p>
-          <a:p>
-            <a:pPr>
-              <a:spcAft>
-                <a:spcPts val="600"/>
-              </a:spcAft>
-              <a:defRPr sz="1200">
-                <a:solidFill>
-                  <a:srgbClr val="F8FAFC"/>
-                </a:solidFill>
-                <a:latin typeface="Calibri"/>
-              </a:defRPr>
-            </a:pPr>
-            <a:r>
-              <a:t>   • q = 35.0m (5 cars) -&gt; g = 11.5s</a:t>
-            </a:r>
-          </a:p>
-          <a:p>
-            <a:pPr>
-              <a:spcAft>
-                <a:spcPts val="600"/>
-              </a:spcAft>
-              <a:defRPr sz="1200">
-                <a:solidFill>
-                  <a:srgbClr val="F8FAFC"/>
-                </a:solidFill>
-                <a:latin typeface="Calibri"/>
-              </a:defRPr>
-            </a:pPr>
-            <a:r>
-              <a:t>   • q = 140.0m (20 cars) -&gt; g = 39.9s</a:t>
-            </a:r>
-          </a:p>
-          <a:p>
-            <a:pPr>
-              <a:spcAft>
-                <a:spcPts val="600"/>
-              </a:spcAft>
-              <a:defRPr sz="1200">
-                <a:solidFill>
-                  <a:srgbClr val="F8FAFC"/>
-                </a:solidFill>
-                <a:latin typeface="Calibri"/>
-              </a:defRPr>
-            </a:pPr>
-            <a:r>
-              <a:t>   • q = 350.0m (50 cars) -&gt; g = 60.0s (clamped to g_max)</a:t>
-            </a:r>
-          </a:p>
-          <a:p>
-            <a:pPr>
-              <a:spcAft>
-                <a:spcPts val="600"/>
-              </a:spcAft>
-              <a:defRPr sz="1200">
-                <a:solidFill>
-                  <a:srgbClr val="F8FAFC"/>
-                </a:solidFill>
-                <a:latin typeface="Calibri"/>
-              </a:defRPr>
-            </a:pPr>
-            <a:r>
+              <a:rPr>
+                <a:latin typeface="Calibri"/>
+              </a:rPr>
+              <a:t>   - q = 0.0m -&gt; g = 10.0s (clamped to g_min)</a:t>
+            </a:r>
+          </a:p>
+          <a:p>
+            <a:pPr>
+              <a:spcAft>
+                <a:spcPts val="600"/>
+              </a:spcAft>
+              <a:defRPr sz="1200">
+                <a:solidFill>
+                  <a:srgbClr val="F8FAFC"/>
+                </a:solidFill>
+                <a:latin typeface="Calibri"/>
+              </a:defRPr>
+            </a:pPr>
+            <a:r>
+              <a:rPr>
+                <a:latin typeface="Calibri"/>
+              </a:rPr>
+              <a:t>   - q = 35.0m (5 cars) -&gt; g = 11.5s</a:t>
+            </a:r>
+          </a:p>
+          <a:p>
+            <a:pPr>
+              <a:spcAft>
+                <a:spcPts val="600"/>
+              </a:spcAft>
+              <a:defRPr sz="1200">
+                <a:solidFill>
+                  <a:srgbClr val="F8FAFC"/>
+                </a:solidFill>
+                <a:latin typeface="Calibri"/>
+              </a:defRPr>
+            </a:pPr>
+            <a:r>
+              <a:rPr>
+                <a:latin typeface="Calibri"/>
+              </a:rPr>
+              <a:t>   - q = 140.0m (20 cars) -&gt; g = 39.9s</a:t>
+            </a:r>
+          </a:p>
+          <a:p>
+            <a:pPr>
+              <a:spcAft>
+                <a:spcPts val="600"/>
+              </a:spcAft>
+              <a:defRPr sz="1200">
+                <a:solidFill>
+                  <a:srgbClr val="F8FAFC"/>
+                </a:solidFill>
+                <a:latin typeface="Calibri"/>
+              </a:defRPr>
+            </a:pPr>
+            <a:r>
+              <a:rPr>
+                <a:latin typeface="Calibri"/>
+              </a:rPr>
+              <a:t>   - q = 350.0m (50 cars) -&gt; g = 60.0s (clamped to g_max)</a:t>
+            </a:r>
+          </a:p>
+          <a:p>
+            <a:pPr>
+              <a:spcAft>
+                <a:spcPts val="600"/>
+              </a:spcAft>
+              <a:defRPr sz="1200">
+                <a:solidFill>
+                  <a:srgbClr val="F8FAFC"/>
+                </a:solidFill>
+                <a:latin typeface="Calibri"/>
+              </a:defRPr>
+            </a:pPr>
+            <a:r>
+              <a:rPr>
+                <a:latin typeface="Calibri"/>
+              </a:rPr>
               <a:t>   SC1 PASSED: Strict monotonic scaling bounded in [10s, 60s].</a:t>
             </a:r>
           </a:p>
@@ -11958,6 +12768,9 @@
               </a:defRPr>
             </a:pPr>
             <a:r>
+              <a:rPr>
+                <a:latin typeface="Calibri"/>
+              </a:rPr>
               <a:t>3. Dynamic Density Gap-Out Truncation:</a:t>
             </a:r>
           </a:p>
@@ -11974,6 +12787,9 @@
               </a:defRPr>
             </a:pPr>
             <a:r>
+              <a:rPr>
+                <a:latin typeface="Calibri"/>
+              </a:rPr>
               <a:t>   If rho &lt;= 0.02 veh/m for &gt;= 3.0s, green phase terminates early.</a:t>
             </a:r>
           </a:p>
@@ -12032,6 +12848,9 @@
               </a:defRPr>
             </a:pPr>
             <a:r>
+              <a:rPr>
+                <a:latin typeface="Calibri"/>
+              </a:rPr>
               <a:t>Poisson Goodness-of-Fit Analysis</a:t>
             </a:r>
           </a:p>
@@ -12048,6 +12867,9 @@
               </a:defRPr>
             </a:pPr>
             <a:r>
+              <a:rPr>
+                <a:latin typeface="Calibri"/>
+              </a:rPr>
               <a:t>1. Rolling EWMA Arrival Rate Tracking:</a:t>
             </a:r>
           </a:p>
@@ -12064,6 +12886,9 @@
               </a:defRPr>
             </a:pPr>
             <a:r>
+              <a:rPr>
+                <a:latin typeface="Calibri"/>
+              </a:rPr>
               <a:t>   lambda_t = 0.20 * (Delta_N / Delta_t) + 0.80 * lambda_{t-1}</a:t>
             </a:r>
           </a:p>
@@ -12093,6 +12918,9 @@
               </a:defRPr>
             </a:pPr>
             <a:r>
+              <a:rPr>
+                <a:latin typeface="Calibri"/>
+              </a:rPr>
               <a:t>2. Automated Chi-Square (chi^2) Goodness-of-Fit Check:</a:t>
             </a:r>
           </a:p>
@@ -12109,6 +12937,9 @@
               </a:defRPr>
             </a:pPr>
             <a:r>
+              <a:rPr>
+                <a:latin typeface="Calibri"/>
+              </a:rPr>
               <a:t>   chi^2 = sum_{k=1}^10 ((O_k - E_k)^2 / E_k), N = 479</a:t>
             </a:r>
           </a:p>
@@ -12125,6 +12956,9 @@
               </a:defRPr>
             </a:pPr>
             <a:r>
+              <a:rPr>
+                <a:latin typeface="Calibri"/>
+              </a:rPr>
               <a:t>   Statistic = 2522.27, p-value = 0.000</a:t>
             </a:r>
           </a:p>
@@ -12141,6 +12975,9 @@
               </a:defRPr>
             </a:pPr>
             <a:r>
+              <a:rPr>
+                <a:latin typeface="Calibri"/>
+              </a:rPr>
               <a:t>   Outcome: poisson_assumption_holds = False</a:t>
             </a:r>
           </a:p>
@@ -12170,6 +13007,9 @@
               </a:defRPr>
             </a:pPr>
             <a:r>
+              <a:rPr>
+                <a:latin typeface="Calibri"/>
+              </a:rPr>
               <a:t>3. Honest Empirical Scoping Analysis:</a:t>
             </a:r>
           </a:p>
@@ -12186,6 +13026,9 @@
               </a:defRPr>
             </a:pPr>
             <a:r>
+              <a:rPr>
+                <a:latin typeface="Calibri"/>
+              </a:rPr>
               <a:t>   Uniform 0.25s synthetic frame sampling produces discrete, low-variance arrivals that violate memoryless exponential distributions.</a:t>
             </a:r>
           </a:p>
@@ -12202,6 +13045,9 @@
               </a:defRPr>
             </a:pPr>
             <a:r>
+              <a:rPr>
+                <a:latin typeface="Calibri"/>
+              </a:rPr>
               <a:t>   Rather than masking this, Kinetica logs it transparently and relies on direct homography queue measurements.</a:t>
             </a:r>
           </a:p>
@@ -12301,6 +13147,9 @@
               </a:defRPr>
             </a:pPr>
             <a:r>
+              <a:rPr>
+                <a:latin typeface="Calibri"/>
+              </a:rPr>
               <a:t>MODULE 3: PREEMPTION &amp; CORRIDOR ROUTING</a:t>
             </a:r>
           </a:p>
@@ -12337,6 +13186,9 @@
               </a:defRPr>
             </a:pPr>
             <a:r>
+              <a:rPr>
+                <a:latin typeface="Calibri"/>
+              </a:rPr>
               <a:t>Starvation-Free Max-Heap &amp; Multi-Intersection Green Waves</a:t>
             </a:r>
           </a:p>
@@ -12373,6 +13225,9 @@
               </a:defRPr>
             </a:pPr>
             <a:r>
+              <a:rPr>
+                <a:latin typeface="Calibri"/>
+              </a:rPr>
               <a:t>Sub-microsecond priority arbitration and proactive downstream queue flushing</a:t>
             </a:r>
           </a:p>
@@ -12431,6 +13286,9 @@
               </a:defRPr>
             </a:pPr>
             <a:r>
+              <a:rPr>
+                <a:latin typeface="Calibri"/>
+              </a:rPr>
               <a:t>Urgency Scoring &amp; Max-Heap (SC2)</a:t>
             </a:r>
           </a:p>
@@ -12447,6 +13305,9 @@
               </a:defRPr>
             </a:pPr>
             <a:r>
+              <a:rPr>
+                <a:latin typeface="Calibri"/>
+              </a:rPr>
               <a:t>1. Dynamic Urgency Scoring Formulation:</a:t>
             </a:r>
           </a:p>
@@ -12463,6 +13324,9 @@
               </a:defRPr>
             </a:pPr>
             <a:r>
+              <a:rPr>
+                <a:latin typeface="Calibri"/>
+              </a:rPr>
               <a:t>   Score_i = (M_v * (1.0 + rho_i * beta)) + (gamma * w_i)</a:t>
             </a:r>
           </a:p>
@@ -12479,67 +13343,79 @@
               </a:defRPr>
             </a:pPr>
             <a:r>
-              <a:t>   • Emergency Multiplier: M_AMBULANCE = 1000.0, M_POLICE = 1000.0</a:t>
-            </a:r>
-          </a:p>
-          <a:p>
-            <a:pPr>
-              <a:spcAft>
-                <a:spcPts val="600"/>
-              </a:spcAft>
-              <a:defRPr sz="1200">
-                <a:solidFill>
-                  <a:srgbClr val="F8FAFC"/>
-                </a:solidFill>
-                <a:latin typeface="Calibri"/>
-              </a:defRPr>
-            </a:pPr>
-            <a:r>
-              <a:t>   • School Van Multiplier: M_SCHOOL_VAN = 50.0 (school zones)</a:t>
-            </a:r>
-          </a:p>
-          <a:p>
-            <a:pPr>
-              <a:spcAft>
-                <a:spcPts val="600"/>
-              </a:spcAft>
-              <a:defRPr sz="1200">
-                <a:solidFill>
-                  <a:srgbClr val="F8FAFC"/>
-                </a:solidFill>
-                <a:latin typeface="Calibri"/>
-              </a:defRPr>
-            </a:pPr>
-            <a:r>
-              <a:t>   • Density Weight: beta = 20.0; Aging Weight: gamma = 1.0/s</a:t>
-            </a:r>
-          </a:p>
-          <a:p>
-            <a:pPr>
-              <a:spcAft>
-                <a:spcPts val="600"/>
-              </a:spcAft>
-              <a:defRPr sz="1200">
-                <a:solidFill>
-                  <a:srgbClr val="F8FAFC"/>
-                </a:solidFill>
-                <a:latin typeface="Calibri"/>
-              </a:defRPr>
-            </a:pPr>
-          </a:p>
-          <a:p>
-            <a:pPr>
-              <a:spcAft>
-                <a:spcPts val="600"/>
-              </a:spcAft>
-              <a:defRPr sz="1200">
-                <a:solidFill>
-                  <a:srgbClr val="F8FAFC"/>
-                </a:solidFill>
-                <a:latin typeface="Calibri"/>
-              </a:defRPr>
-            </a:pPr>
-            <a:r>
+              <a:rPr>
+                <a:latin typeface="Calibri"/>
+              </a:rPr>
+              <a:t>   - Emergency Multiplier: M_AMBULANCE = 1000.0, M_POLICE = 1000.0</a:t>
+            </a:r>
+          </a:p>
+          <a:p>
+            <a:pPr>
+              <a:spcAft>
+                <a:spcPts val="600"/>
+              </a:spcAft>
+              <a:defRPr sz="1200">
+                <a:solidFill>
+                  <a:srgbClr val="F8FAFC"/>
+                </a:solidFill>
+                <a:latin typeface="Calibri"/>
+              </a:defRPr>
+            </a:pPr>
+            <a:r>
+              <a:rPr>
+                <a:latin typeface="Calibri"/>
+              </a:rPr>
+              <a:t>   - School Van Multiplier: M_SCHOOL_VAN = 50.0 (school zones)</a:t>
+            </a:r>
+          </a:p>
+          <a:p>
+            <a:pPr>
+              <a:spcAft>
+                <a:spcPts val="600"/>
+              </a:spcAft>
+              <a:defRPr sz="1200">
+                <a:solidFill>
+                  <a:srgbClr val="F8FAFC"/>
+                </a:solidFill>
+                <a:latin typeface="Calibri"/>
+              </a:defRPr>
+            </a:pPr>
+            <a:r>
+              <a:rPr>
+                <a:latin typeface="Calibri"/>
+              </a:rPr>
+              <a:t>   - Density Weight: beta = 20.0; Aging Weight: gamma = 1.0/s</a:t>
+            </a:r>
+          </a:p>
+          <a:p>
+            <a:pPr>
+              <a:spcAft>
+                <a:spcPts val="600"/>
+              </a:spcAft>
+              <a:defRPr sz="1200">
+                <a:solidFill>
+                  <a:srgbClr val="F8FAFC"/>
+                </a:solidFill>
+                <a:latin typeface="Calibri"/>
+              </a:defRPr>
+            </a:pPr>
+          </a:p>
+          <a:p>
+            <a:pPr>
+              <a:spcAft>
+                <a:spcPts val="600"/>
+              </a:spcAft>
+              <a:defRPr sz="1200">
+                <a:solidFill>
+                  <a:srgbClr val="F8FAFC"/>
+                </a:solidFill>
+                <a:latin typeface="Calibri"/>
+              </a:defRPr>
+            </a:pPr>
+            <a:r>
+              <a:rPr>
+                <a:latin typeface="Calibri"/>
+              </a:rPr>
               <a:t>2. The Anti-Starvation Aging Invariant:</a:t>
             </a:r>
           </a:p>
@@ -12556,6 +13432,9 @@
               </a:defRPr>
             </a:pPr>
             <a:r>
+              <a:rPr>
+                <a:latin typeface="Calibri"/>
+              </a:rPr>
               <a:t>   Linear wait-time growth (+1.0*w) guarantees unserved cross-streets accumulate sufficient urgency to prevent infinite lockout.</a:t>
             </a:r>
           </a:p>
@@ -12585,6 +13464,9 @@
               </a:defRPr>
             </a:pPr>
             <a:r>
+              <a:rPr>
+                <a:latin typeface="Calibri"/>
+              </a:rPr>
               <a:t>3. Tombstone-Purged Max-Heap (LanePriorityHeap):</a:t>
             </a:r>
           </a:p>
@@ -12601,38 +13483,47 @@
               </a:defRPr>
             </a:pPr>
             <a:r>
-              <a:t>   • 4 Lanes: 0.00075 ms (750 ns) — 1333x faster than 1ms budget</a:t>
-            </a:r>
-          </a:p>
-          <a:p>
-            <a:pPr>
-              <a:spcAft>
-                <a:spcPts val="600"/>
-              </a:spcAft>
-              <a:defRPr sz="1200">
-                <a:solidFill>
-                  <a:srgbClr val="F8FAFC"/>
-                </a:solidFill>
-                <a:latin typeface="Calibri"/>
-              </a:defRPr>
-            </a:pPr>
-            <a:r>
-              <a:t>   • 32 Lanes: 0.00029 ms (290 ns) — sub-microsecond scaling</a:t>
-            </a:r>
-          </a:p>
-          <a:p>
-            <a:pPr>
-              <a:spcAft>
-                <a:spcPts val="600"/>
-              </a:spcAft>
-              <a:defRPr sz="1200">
-                <a:solidFill>
-                  <a:srgbClr val="F8FAFC"/>
-                </a:solidFill>
-                <a:latin typeface="Calibri"/>
-              </a:defRPr>
-            </a:pPr>
-            <a:r>
+              <a:rPr>
+                <a:latin typeface="Calibri"/>
+              </a:rPr>
+              <a:t>   - 4 Lanes: 0.00075 ms (750 ns)  -  1333x faster than 1ms budget</a:t>
+            </a:r>
+          </a:p>
+          <a:p>
+            <a:pPr>
+              <a:spcAft>
+                <a:spcPts val="600"/>
+              </a:spcAft>
+              <a:defRPr sz="1200">
+                <a:solidFill>
+                  <a:srgbClr val="F8FAFC"/>
+                </a:solidFill>
+                <a:latin typeface="Calibri"/>
+              </a:defRPr>
+            </a:pPr>
+            <a:r>
+              <a:rPr>
+                <a:latin typeface="Calibri"/>
+              </a:rPr>
+              <a:t>   - 32 Lanes: 0.00029 ms (290 ns)  -  sub-microsecond scaling</a:t>
+            </a:r>
+          </a:p>
+          <a:p>
+            <a:pPr>
+              <a:spcAft>
+                <a:spcPts val="600"/>
+              </a:spcAft>
+              <a:defRPr sz="1200">
+                <a:solidFill>
+                  <a:srgbClr val="F8FAFC"/>
+                </a:solidFill>
+                <a:latin typeface="Calibri"/>
+              </a:defRPr>
+            </a:pPr>
+            <a:r>
+              <a:rPr>
+                <a:latin typeface="Calibri"/>
+              </a:rPr>
               <a:t>   SC2 PASSED: Ambulance (Score 3000.0) seizes root ahead of queues.</a:t>
             </a:r>
           </a:p>
@@ -12691,6 +13582,9 @@
               </a:defRPr>
             </a:pPr>
             <a:r>
+              <a:rPr>
+                <a:latin typeface="Calibri"/>
+              </a:rPr>
               <a:t>Corridor Green Wave Preclear (SC3)</a:t>
             </a:r>
           </a:p>
@@ -12707,6 +13601,9 @@
               </a:defRPr>
             </a:pPr>
             <a:r>
+              <a:rPr>
+                <a:latin typeface="Calibri"/>
+              </a:rPr>
               <a:t>1. Directed Network Graph Trajectory Projection:</a:t>
             </a:r>
           </a:p>
@@ -12723,6 +13620,9 @@
               </a:defRPr>
             </a:pPr>
             <a:r>
+              <a:rPr>
+                <a:latin typeface="Calibri"/>
+              </a:rPr>
               <a:t>   Network modeled as directed graph G = (V, E) in NetworkX.</a:t>
             </a:r>
           </a:p>
@@ -12752,6 +13652,9 @@
               </a:defRPr>
             </a:pPr>
             <a:r>
+              <a:rPr>
+                <a:latin typeface="Calibri"/>
+              </a:rPr>
               <a:t>2. Proactive Downstream Preclearance:</a:t>
             </a:r>
           </a:p>
@@ -12768,6 +13671,9 @@
               </a:defRPr>
             </a:pPr>
             <a:r>
+              <a:rPr>
+                <a:latin typeface="Calibri"/>
+              </a:rPr>
               <a:t>   Ambulance detected at IX-01 triggers downstream path projection:</a:t>
             </a:r>
           </a:p>
@@ -12784,6 +13690,9 @@
               </a:defRPr>
             </a:pPr>
             <a:r>
+              <a:rPr>
+                <a:latin typeface="Calibri"/>
+              </a:rPr>
               <a:t>   Corridor Path = [IX-02, IX-03, IX-04]</a:t>
             </a:r>
           </a:p>
@@ -12813,6 +13722,9 @@
               </a:defRPr>
             </a:pPr>
             <a:r>
+              <a:rPr>
+                <a:latin typeface="Calibri"/>
+              </a:rPr>
               <a:t>3. Eliminating the 'Standing Queue Trap':</a:t>
             </a:r>
           </a:p>
@@ -12829,6 +13741,9 @@
               </a:defRPr>
             </a:pPr>
             <a:r>
+              <a:rPr>
+                <a:latin typeface="Calibri"/>
+              </a:rPr>
               <a:t>   Signals at IX-02, IX-03, and IX-04 are pre-empted ahead of arrival, flushing standing red-light queues out of the arterial corridor.</a:t>
             </a:r>
           </a:p>
@@ -12858,6 +13773,9 @@
               </a:defRPr>
             </a:pPr>
             <a:r>
+              <a:rPr>
+                <a:latin typeface="Calibri"/>
+              </a:rPr>
               <a:t>4. SC3 PASSED:</a:t>
             </a:r>
           </a:p>
@@ -12874,6 +13792,9 @@
               </a:defRPr>
             </a:pPr>
             <a:r>
+              <a:rPr>
+                <a:latin typeface="Calibri"/>
+              </a:rPr>
               <a:t>   Preclear emitted for 3 downstream intersections with reason = PREEMPTED and 30.0s green window.</a:t>
             </a:r>
           </a:p>
@@ -12973,6 +13894,9 @@
               </a:defRPr>
             </a:pPr>
             <a:r>
+              <a:rPr>
+                <a:latin typeface="Calibri"/>
+              </a:rPr>
               <a:t>OBSERVABILITY LAYER</a:t>
             </a:r>
           </a:p>
@@ -13009,6 +13933,9 @@
               </a:defRPr>
             </a:pPr>
             <a:r>
+              <a:rPr>
+                <a:latin typeface="Calibri"/>
+              </a:rPr>
               <a:t>Next.js 16 / React 19 Control Room &amp; FastAPI Edge Gateway</a:t>
             </a:r>
           </a:p>
@@ -13045,6 +13972,9 @@
               </a:defRPr>
             </a:pPr>
             <a:r>
+              <a:rPr>
+                <a:latin typeface="Calibri"/>
+              </a:rPr>
               <a:t>Enterprise-grade human-factors dashboard broadcasting 30 Hz live traffic telemetry</a:t>
             </a:r>
           </a:p>
@@ -13103,6 +14033,9 @@
               </a:defRPr>
             </a:pPr>
             <a:r>
+              <a:rPr>
+                <a:latin typeface="Calibri"/>
+              </a:rPr>
               <a:t>Next.js Control Room Features</a:t>
             </a:r>
           </a:p>
@@ -13119,6 +14052,9 @@
               </a:defRPr>
             </a:pPr>
             <a:r>
+              <a:rPr>
+                <a:latin typeface="Calibri"/>
+              </a:rPr>
               <a:t>1. Top-Down CAD Junction Simulator:</a:t>
             </a:r>
           </a:p>
@@ -13135,51 +14071,60 @@
               </a:defRPr>
             </a:pPr>
             <a:r>
-              <a:t>   • Expanded 67% grid layout (880 x 520 px canvas).</a:t>
-            </a:r>
-          </a:p>
-          <a:p>
-            <a:pPr>
-              <a:spcAft>
-                <a:spcPts val="600"/>
-              </a:spcAft>
-              <a:defRPr sz="1200">
-                <a:solidFill>
-                  <a:srgbClr val="F8FAFC"/>
-                </a:solidFill>
-                <a:latin typeface="Calibri"/>
-              </a:defRPr>
-            </a:pPr>
-            <a:r>
-              <a:t>   • Real-time vehicle kinematics, stopline queue polygons, dynamic signal heads, and emergency flashers.</a:t>
-            </a:r>
-          </a:p>
-          <a:p>
-            <a:pPr>
-              <a:spcAft>
-                <a:spcPts val="600"/>
-              </a:spcAft>
-              <a:defRPr sz="1200">
-                <a:solidFill>
-                  <a:srgbClr val="F8FAFC"/>
-                </a:solidFill>
-                <a:latin typeface="Calibri"/>
-              </a:defRPr>
-            </a:pPr>
-          </a:p>
-          <a:p>
-            <a:pPr>
-              <a:spcAft>
-                <a:spcPts val="600"/>
-              </a:spcAft>
-              <a:defRPr sz="1200">
-                <a:solidFill>
-                  <a:srgbClr val="F8FAFC"/>
-                </a:solidFill>
-                <a:latin typeface="Calibri"/>
-              </a:defRPr>
-            </a:pPr>
-            <a:r>
+              <a:rPr>
+                <a:latin typeface="Calibri"/>
+              </a:rPr>
+              <a:t>   - Expanded 67% grid layout (880 x 520 px canvas).</a:t>
+            </a:r>
+          </a:p>
+          <a:p>
+            <a:pPr>
+              <a:spcAft>
+                <a:spcPts val="600"/>
+              </a:spcAft>
+              <a:defRPr sz="1200">
+                <a:solidFill>
+                  <a:srgbClr val="F8FAFC"/>
+                </a:solidFill>
+                <a:latin typeface="Calibri"/>
+              </a:defRPr>
+            </a:pPr>
+            <a:r>
+              <a:rPr>
+                <a:latin typeface="Calibri"/>
+              </a:rPr>
+              <a:t>   - Real-time vehicle kinematics, stopline queue polygons, dynamic signal heads, and emergency flashers.</a:t>
+            </a:r>
+          </a:p>
+          <a:p>
+            <a:pPr>
+              <a:spcAft>
+                <a:spcPts val="600"/>
+              </a:spcAft>
+              <a:defRPr sz="1200">
+                <a:solidFill>
+                  <a:srgbClr val="F8FAFC"/>
+                </a:solidFill>
+                <a:latin typeface="Calibri"/>
+              </a:defRPr>
+            </a:pPr>
+          </a:p>
+          <a:p>
+            <a:pPr>
+              <a:spcAft>
+                <a:spcPts val="600"/>
+              </a:spcAft>
+              <a:defRPr sz="1200">
+                <a:solidFill>
+                  <a:srgbClr val="F8FAFC"/>
+                </a:solidFill>
+                <a:latin typeface="Calibri"/>
+              </a:defRPr>
+            </a:pPr>
+            <a:r>
+              <a:rPr>
+                <a:latin typeface="Calibri"/>
+              </a:rPr>
               <a:t>2. Live Vision Monitor View:</a:t>
             </a:r>
           </a:p>
@@ -13196,35 +14141,41 @@
               </a:defRPr>
             </a:pPr>
             <a:r>
-              <a:t>   • Real-time CCTV ingestion, YOLOv8 detection overlays, and metric queue length readouts.</a:t>
-            </a:r>
-          </a:p>
-          <a:p>
-            <a:pPr>
-              <a:spcAft>
-                <a:spcPts val="600"/>
-              </a:spcAft>
-              <a:defRPr sz="1200">
-                <a:solidFill>
-                  <a:srgbClr val="F8FAFC"/>
-                </a:solidFill>
-                <a:latin typeface="Calibri"/>
-              </a:defRPr>
-            </a:pPr>
-          </a:p>
-          <a:p>
-            <a:pPr>
-              <a:spcAft>
-                <a:spcPts val="600"/>
-              </a:spcAft>
-              <a:defRPr sz="1200">
-                <a:solidFill>
-                  <a:srgbClr val="F8FAFC"/>
-                </a:solidFill>
-                <a:latin typeface="Calibri"/>
-              </a:defRPr>
-            </a:pPr>
-            <a:r>
+              <a:rPr>
+                <a:latin typeface="Calibri"/>
+              </a:rPr>
+              <a:t>   - Real-time CCTV ingestion, YOLOv8 detection overlays, and metric queue length readouts.</a:t>
+            </a:r>
+          </a:p>
+          <a:p>
+            <a:pPr>
+              <a:spcAft>
+                <a:spcPts val="600"/>
+              </a:spcAft>
+              <a:defRPr sz="1200">
+                <a:solidFill>
+                  <a:srgbClr val="F8FAFC"/>
+                </a:solidFill>
+                <a:latin typeface="Calibri"/>
+              </a:defRPr>
+            </a:pPr>
+          </a:p>
+          <a:p>
+            <a:pPr>
+              <a:spcAft>
+                <a:spcPts val="600"/>
+              </a:spcAft>
+              <a:defRPr sz="1200">
+                <a:solidFill>
+                  <a:srgbClr val="F8FAFC"/>
+                </a:solidFill>
+                <a:latin typeface="Calibri"/>
+              </a:defRPr>
+            </a:pPr>
+            <a:r>
+              <a:rPr>
+                <a:latin typeface="Calibri"/>
+              </a:rPr>
               <a:t>3. Emergency Preemption Incident Feed:</a:t>
             </a:r>
           </a:p>
@@ -13241,35 +14192,41 @@
               </a:defRPr>
             </a:pPr>
             <a:r>
-              <a:t>   • Instant 108 ambulance detection banners, priority score elevations, and downstream corridor route tracking.</a:t>
-            </a:r>
-          </a:p>
-          <a:p>
-            <a:pPr>
-              <a:spcAft>
-                <a:spcPts val="600"/>
-              </a:spcAft>
-              <a:defRPr sz="1200">
-                <a:solidFill>
-                  <a:srgbClr val="F8FAFC"/>
-                </a:solidFill>
-                <a:latin typeface="Calibri"/>
-              </a:defRPr>
-            </a:pPr>
-          </a:p>
-          <a:p>
-            <a:pPr>
-              <a:spcAft>
-                <a:spcPts val="600"/>
-              </a:spcAft>
-              <a:defRPr sz="1200">
-                <a:solidFill>
-                  <a:srgbClr val="F8FAFC"/>
-                </a:solidFill>
-                <a:latin typeface="Calibri"/>
-              </a:defRPr>
-            </a:pPr>
-            <a:r>
+              <a:rPr>
+                <a:latin typeface="Calibri"/>
+              </a:rPr>
+              <a:t>   - Instant 108 ambulance detection banners, priority score elevations, and downstream corridor route tracking.</a:t>
+            </a:r>
+          </a:p>
+          <a:p>
+            <a:pPr>
+              <a:spcAft>
+                <a:spcPts val="600"/>
+              </a:spcAft>
+              <a:defRPr sz="1200">
+                <a:solidFill>
+                  <a:srgbClr val="F8FAFC"/>
+                </a:solidFill>
+                <a:latin typeface="Calibri"/>
+              </a:defRPr>
+            </a:pPr>
+          </a:p>
+          <a:p>
+            <a:pPr>
+              <a:spcAft>
+                <a:spcPts val="600"/>
+              </a:spcAft>
+              <a:defRPr sz="1200">
+                <a:solidFill>
+                  <a:srgbClr val="F8FAFC"/>
+                </a:solidFill>
+                <a:latin typeface="Calibri"/>
+              </a:defRPr>
+            </a:pPr>
+            <a:r>
+              <a:rPr>
+                <a:latin typeface="Calibri"/>
+              </a:rPr>
               <a:t>4. Empirical Telemetry Hub:</a:t>
             </a:r>
           </a:p>
@@ -13286,7 +14243,10 @@
               </a:defRPr>
             </a:pPr>
             <a:r>
-              <a:t>   • Real-time charts for arrival rates, delay distributions, and hypothesis test metrics directly from backend logs.</a:t>
+              <a:rPr>
+                <a:latin typeface="Calibri"/>
+              </a:rPr>
+              <a:t>   - Real-time charts for arrival rates, delay distributions, and hypothesis test metrics directly from backend logs.</a:t>
             </a:r>
           </a:p>
         </p:txBody>
@@ -13344,6 +14304,9 @@
               </a:defRPr>
             </a:pPr>
             <a:r>
+              <a:rPr>
+                <a:latin typeface="Calibri"/>
+              </a:rPr>
               <a:t>FastAPI Edge Gateway Architecture</a:t>
             </a:r>
           </a:p>
@@ -13360,6 +14323,9 @@
               </a:defRPr>
             </a:pPr>
             <a:r>
+              <a:rPr>
+                <a:latin typeface="Calibri"/>
+              </a:rPr>
               <a:t>1. Asynchronous Python Backend (edge_gateway.py):</a:t>
             </a:r>
           </a:p>
@@ -13376,6 +14342,9 @@
               </a:defRPr>
             </a:pPr>
             <a:r>
+              <a:rPr>
+                <a:latin typeface="Calibri"/>
+              </a:rPr>
               <a:t>   High-performance uvicorn server running on http://localhost:8000.</a:t>
             </a:r>
           </a:p>
@@ -13405,6 +14374,9 @@
               </a:defRPr>
             </a:pPr>
             <a:r>
+              <a:rPr>
+                <a:latin typeface="Calibri"/>
+              </a:rPr>
               <a:t>2. Core REST &amp; WebSocket Endpoints:</a:t>
             </a:r>
           </a:p>
@@ -13421,99 +14393,117 @@
               </a:defRPr>
             </a:pPr>
             <a:r>
-              <a:t>   • GET /api/health — Model status probe (YOLOv8n ONNX online).</a:t>
-            </a:r>
-          </a:p>
-          <a:p>
-            <a:pPr>
-              <a:spcAft>
-                <a:spcPts val="600"/>
-              </a:spcAft>
-              <a:defRPr sz="1200">
-                <a:solidFill>
-                  <a:srgbClr val="F8FAFC"/>
-                </a:solidFill>
-                <a:latin typeface="Calibri"/>
-              </a:defRPr>
-            </a:pPr>
-            <a:r>
-              <a:t>   • GET /api/telemetry — Approach queue lengths and active phase.</a:t>
-            </a:r>
-          </a:p>
-          <a:p>
-            <a:pPr>
-              <a:spcAft>
-                <a:spcPts val="600"/>
-              </a:spcAft>
-              <a:defRPr sz="1200">
-                <a:solidFill>
-                  <a:srgbClr val="F8FAFC"/>
-                </a:solidFill>
-                <a:latin typeface="Calibri"/>
-              </a:defRPr>
-            </a:pPr>
-            <a:r>
-              <a:t>   • POST /api/detect — Raw frame ingestion for edge inference.</a:t>
-            </a:r>
-          </a:p>
-          <a:p>
-            <a:pPr>
-              <a:spcAft>
-                <a:spcPts val="600"/>
-              </a:spcAft>
-              <a:defRPr sz="1200">
-                <a:solidFill>
-                  <a:srgbClr val="F8FAFC"/>
-                </a:solidFill>
-                <a:latin typeface="Calibri"/>
-              </a:defRPr>
-            </a:pPr>
-            <a:r>
-              <a:t>   • POST /api/preempt — Manual emergency injection trigger.</a:t>
-            </a:r>
-          </a:p>
-          <a:p>
-            <a:pPr>
-              <a:spcAft>
-                <a:spcPts val="600"/>
-              </a:spcAft>
-              <a:defRPr sz="1200">
-                <a:solidFill>
-                  <a:srgbClr val="F8FAFC"/>
-                </a:solidFill>
-                <a:latin typeface="Calibri"/>
-              </a:defRPr>
-            </a:pPr>
-            <a:r>
-              <a:t>   • GET /ws/traffic — Bidirectional 30 Hz live WebSocket broadcast.</a:t>
-            </a:r>
-          </a:p>
-          <a:p>
-            <a:pPr>
-              <a:spcAft>
-                <a:spcPts val="600"/>
-              </a:spcAft>
-              <a:defRPr sz="1200">
-                <a:solidFill>
-                  <a:srgbClr val="F8FAFC"/>
-                </a:solidFill>
-                <a:latin typeface="Calibri"/>
-              </a:defRPr>
-            </a:pPr>
-          </a:p>
-          <a:p>
-            <a:pPr>
-              <a:spcAft>
-                <a:spcPts val="600"/>
-              </a:spcAft>
-              <a:defRPr sz="1200">
-                <a:solidFill>
-                  <a:srgbClr val="F8FAFC"/>
-                </a:solidFill>
-                <a:latin typeface="Calibri"/>
-              </a:defRPr>
-            </a:pPr>
-            <a:r>
+              <a:rPr>
+                <a:latin typeface="Calibri"/>
+              </a:rPr>
+              <a:t>   - GET /api/health  -  Model status probe (YOLOv8n ONNX online).</a:t>
+            </a:r>
+          </a:p>
+          <a:p>
+            <a:pPr>
+              <a:spcAft>
+                <a:spcPts val="600"/>
+              </a:spcAft>
+              <a:defRPr sz="1200">
+                <a:solidFill>
+                  <a:srgbClr val="F8FAFC"/>
+                </a:solidFill>
+                <a:latin typeface="Calibri"/>
+              </a:defRPr>
+            </a:pPr>
+            <a:r>
+              <a:rPr>
+                <a:latin typeface="Calibri"/>
+              </a:rPr>
+              <a:t>   - GET /api/telemetry  -  Approach queue lengths and active phase.</a:t>
+            </a:r>
+          </a:p>
+          <a:p>
+            <a:pPr>
+              <a:spcAft>
+                <a:spcPts val="600"/>
+              </a:spcAft>
+              <a:defRPr sz="1200">
+                <a:solidFill>
+                  <a:srgbClr val="F8FAFC"/>
+                </a:solidFill>
+                <a:latin typeface="Calibri"/>
+              </a:defRPr>
+            </a:pPr>
+            <a:r>
+              <a:rPr>
+                <a:latin typeface="Calibri"/>
+              </a:rPr>
+              <a:t>   - POST /api/detect  -  Raw frame ingestion for edge inference.</a:t>
+            </a:r>
+          </a:p>
+          <a:p>
+            <a:pPr>
+              <a:spcAft>
+                <a:spcPts val="600"/>
+              </a:spcAft>
+              <a:defRPr sz="1200">
+                <a:solidFill>
+                  <a:srgbClr val="F8FAFC"/>
+                </a:solidFill>
+                <a:latin typeface="Calibri"/>
+              </a:defRPr>
+            </a:pPr>
+            <a:r>
+              <a:rPr>
+                <a:latin typeface="Calibri"/>
+              </a:rPr>
+              <a:t>   - POST /api/preempt  -  Manual emergency injection trigger.</a:t>
+            </a:r>
+          </a:p>
+          <a:p>
+            <a:pPr>
+              <a:spcAft>
+                <a:spcPts val="600"/>
+              </a:spcAft>
+              <a:defRPr sz="1200">
+                <a:solidFill>
+                  <a:srgbClr val="F8FAFC"/>
+                </a:solidFill>
+                <a:latin typeface="Calibri"/>
+              </a:defRPr>
+            </a:pPr>
+            <a:r>
+              <a:rPr>
+                <a:latin typeface="Calibri"/>
+              </a:rPr>
+              <a:t>   - GET /ws/traffic  -  Bidirectional 30 Hz live WebSocket broadcast.</a:t>
+            </a:r>
+          </a:p>
+          <a:p>
+            <a:pPr>
+              <a:spcAft>
+                <a:spcPts val="600"/>
+              </a:spcAft>
+              <a:defRPr sz="1200">
+                <a:solidFill>
+                  <a:srgbClr val="F8FAFC"/>
+                </a:solidFill>
+                <a:latin typeface="Calibri"/>
+              </a:defRPr>
+            </a:pPr>
+          </a:p>
+          <a:p>
+            <a:pPr>
+              <a:spcAft>
+                <a:spcPts val="600"/>
+              </a:spcAft>
+              <a:defRPr sz="1200">
+                <a:solidFill>
+                  <a:srgbClr val="F8FAFC"/>
+                </a:solidFill>
+                <a:latin typeface="Calibri"/>
+              </a:defRPr>
+            </a:pPr>
+            <a:r>
+              <a:rPr>
+                <a:latin typeface="Calibri"/>
+              </a:rPr>
               <a:t>3. Read-Only Observability Constraint:</a:t>
             </a:r>
           </a:p>
@@ -13530,6 +14520,9 @@
               </a:defRPr>
             </a:pPr>
             <a:r>
+              <a:rPr>
+                <a:latin typeface="Calibri"/>
+              </a:rPr>
               <a:t>   Dashboard strictly visualizes backend data; zero client-side metric fabrication.</a:t>
             </a:r>
           </a:p>
